--- a/docs/navi-delivery-overview.pptx
+++ b/docs/navi-delivery-overview.pptx
@@ -22,9 +22,11 @@
     <p:sldId id="270" r:id="rId16"/>
     <p:sldId id="271" r:id="rId17"/>
     <p:sldId id="272" r:id="rId18"/>
+    <p:sldId id="273" r:id="rId19"/>
+    <p:sldId id="274" r:id="rId20"/>
   </p:sldIdLst>
   <p:notesMasterIdLst>
-    <p:notesMasterId r:id="rId19"/>
+    <p:notesMasterId r:id="rId21"/>
   </p:notesMasterIdLst>
   <p:sldSz cx="12192000" cy="6858000"/>
   <p:notesSz cx="6858000" cy="12192000"/>
@@ -518,7 +520,7 @@
           <a:p>
             <a:r>
               <a:rPr lang="en-US" dirty="0"/>
-              <a:t>navi-delivery is built and shipped, not a design. Counts verified from the repo: 11 agents, 39 skills across 12 disciplines, 9 phases and gates, 4 lanes, a 7-verb CLI.</a:t>
+              <a:t>navi-delivery is built and shipped, not a design. Counts read from the repo at build time: 11 agents, 49 skills across 13 disciplines, 9 phases and gates, 4 lanes, an 8-verb CLI.</a:t>
             </a:r>
             <a:endParaRPr lang="en-US" dirty="0"/>
           </a:p>
@@ -1222,7 +1224,7 @@
           <a:p>
             <a:r>
               <a:rPr lang="en-US" dirty="0"/>
-              <a:t/>
+              <a:t>config/mcp/ ships five connection files and a .env.example; scripts/validate_mcp_configs.py runs in CI. automation/cron/ is opt-in and prints its crontab line rather than installing it, unless you pass --apply.</a:t>
             </a:r>
             <a:endParaRPr lang="en-US" dirty="0"/>
           </a:p>
@@ -1246,6 +1248,182 @@
             <a:fld id="{F7021451-1387-4CA6-816F-3879F97B5CBC}" type="slidenum">
               <a:rPr lang="en-US"/>
               <a:t>17</a:t>
+            </a:fld>
+            <a:endParaRPr lang="en-US"/>
+          </a:p>
+        </p:txBody>
+      </p:sp>
+    </p:spTree>
+    <p:extLst>
+      <p:ext uri="{BB962C8B-B14F-4D97-AF65-F5344CB8AC3E}">
+        <p14:creationId xmlns:p14="http://schemas.microsoft.com/office/powerpoint/2010/main" val="1024086991"/>
+      </p:ext>
+    </p:extLst>
+  </p:cSld>
+  <p:clrMapOvr>
+    <a:masterClrMapping/>
+  </p:clrMapOvr>
+</p:notes>
+</file>
+
+<file path=ppt/notesSlides/notesSlide18.xml><?xml version="1.0" encoding="utf-8"?>
+<p:notes xmlns:a="http://schemas.openxmlformats.org/drawingml/2006/main" xmlns:r="http://schemas.openxmlformats.org/officeDocument/2006/relationships" xmlns:p="http://schemas.openxmlformats.org/presentationml/2006/main">
+  <p:cSld>
+    <p:spTree>
+      <p:nvGrpSpPr>
+        <p:cNvPr id="1" name=""/>
+        <p:cNvGrpSpPr/>
+        <p:nvPr/>
+      </p:nvGrpSpPr>
+      <p:grpSpPr>
+        <a:xfrm>
+          <a:off x="0" y="0"/>
+          <a:ext cx="0" cy="0"/>
+          <a:chOff x="0" y="0"/>
+          <a:chExt cx="0" cy="0"/>
+        </a:xfrm>
+      </p:grpSpPr>
+      <p:sp>
+        <p:nvSpPr>
+          <p:cNvPr id="2" name="Slide Image Placeholder 1"/>
+          <p:cNvSpPr>
+            <a:spLocks noGrp="1" noRot="1" noChangeAspect="1"/>
+          </p:cNvSpPr>
+          <p:nvPr>
+            <p:ph type="sldImg"/>
+          </p:nvPr>
+        </p:nvSpPr>
+        <p:spPr/>
+      </p:sp>
+      <p:sp>
+        <p:nvSpPr>
+          <p:cNvPr id="3" name="Notes Placeholder 2"/>
+          <p:cNvSpPr>
+            <a:spLocks noGrp="1"/>
+          </p:cNvSpPr>
+          <p:nvPr>
+            <p:ph type="body" idx="1"/>
+          </p:nvPr>
+        </p:nvSpPr>
+        <p:spPr/>
+        <p:txBody>
+          <a:bodyPr/>
+          <a:lstStyle/>
+          <a:p>
+            <a:r>
+              <a:rPr lang="en-US" dirty="0"/>
+              <a:t>doctor shows which backends are configured and what is missing, by variable name, printing header names and never header values. preview builds the payload through the same pure fold export uses. A refused export exits non-zero and changes nothing about the delivery record.</a:t>
+            </a:r>
+            <a:endParaRPr lang="en-US" dirty="0"/>
+          </a:p>
+        </p:txBody>
+      </p:sp>
+      <p:sp>
+        <p:nvSpPr>
+          <p:cNvPr id="4" name="Slide Number Placeholder 3"/>
+          <p:cNvSpPr>
+            <a:spLocks noGrp="1"/>
+          </p:cNvSpPr>
+          <p:nvPr>
+            <p:ph type="sldNum" sz="quarter" idx="10"/>
+          </p:nvPr>
+        </p:nvSpPr>
+        <p:spPr/>
+        <p:txBody>
+          <a:bodyPr/>
+          <a:lstStyle/>
+          <a:p>
+            <a:fld id="{F7021451-1387-4CA6-816F-3879F97B5CBC}" type="slidenum">
+              <a:rPr lang="en-US"/>
+              <a:t>18</a:t>
+            </a:fld>
+            <a:endParaRPr lang="en-US"/>
+          </a:p>
+        </p:txBody>
+      </p:sp>
+    </p:spTree>
+    <p:extLst>
+      <p:ext uri="{BB962C8B-B14F-4D97-AF65-F5344CB8AC3E}">
+        <p14:creationId xmlns:p14="http://schemas.microsoft.com/office/powerpoint/2010/main" val="1024086991"/>
+      </p:ext>
+    </p:extLst>
+  </p:cSld>
+  <p:clrMapOvr>
+    <a:masterClrMapping/>
+  </p:clrMapOvr>
+</p:notes>
+</file>
+
+<file path=ppt/notesSlides/notesSlide19.xml><?xml version="1.0" encoding="utf-8"?>
+<p:notes xmlns:a="http://schemas.openxmlformats.org/drawingml/2006/main" xmlns:r="http://schemas.openxmlformats.org/officeDocument/2006/relationships" xmlns:p="http://schemas.openxmlformats.org/presentationml/2006/main">
+  <p:cSld>
+    <p:spTree>
+      <p:nvGrpSpPr>
+        <p:cNvPr id="1" name=""/>
+        <p:cNvGrpSpPr/>
+        <p:nvPr/>
+      </p:nvGrpSpPr>
+      <p:grpSpPr>
+        <a:xfrm>
+          <a:off x="0" y="0"/>
+          <a:ext cx="0" cy="0"/>
+          <a:chOff x="0" y="0"/>
+          <a:chExt cx="0" cy="0"/>
+        </a:xfrm>
+      </p:grpSpPr>
+      <p:sp>
+        <p:nvSpPr>
+          <p:cNvPr id="2" name="Slide Image Placeholder 1"/>
+          <p:cNvSpPr>
+            <a:spLocks noGrp="1" noRot="1" noChangeAspect="1"/>
+          </p:cNvSpPr>
+          <p:nvPr>
+            <p:ph type="sldImg"/>
+          </p:nvPr>
+        </p:nvSpPr>
+        <p:spPr/>
+      </p:sp>
+      <p:sp>
+        <p:nvSpPr>
+          <p:cNvPr id="3" name="Notes Placeholder 2"/>
+          <p:cNvSpPr>
+            <a:spLocks noGrp="1"/>
+          </p:cNvSpPr>
+          <p:nvPr>
+            <p:ph type="body" idx="1"/>
+          </p:nvPr>
+        </p:nvSpPr>
+        <p:spPr/>
+        <p:txBody>
+          <a:bodyPr/>
+          <a:lstStyle/>
+          <a:p>
+            <a:r>
+              <a:rPr lang="en-US" dirty="0"/>
+              <a:t/>
+            </a:r>
+            <a:endParaRPr lang="en-US" dirty="0"/>
+          </a:p>
+        </p:txBody>
+      </p:sp>
+      <p:sp>
+        <p:nvSpPr>
+          <p:cNvPr id="4" name="Slide Number Placeholder 3"/>
+          <p:cNvSpPr>
+            <a:spLocks noGrp="1"/>
+          </p:cNvSpPr>
+          <p:nvPr>
+            <p:ph type="sldNum" sz="quarter" idx="10"/>
+          </p:nvPr>
+        </p:nvSpPr>
+        <p:spPr/>
+        <p:txBody>
+          <a:bodyPr/>
+          <a:lstStyle/>
+          <a:p>
+            <a:fld id="{F7021451-1387-4CA6-816F-3879F97B5CBC}" type="slidenum">
+              <a:rPr lang="en-US"/>
+              <a:t>19</a:t>
             </a:fld>
             <a:endParaRPr lang="en-US"/>
           </a:p>
@@ -2644,7 +2822,7 @@
                 <a:ea typeface="Mulish" pitchFamily="34" charset="-122"/>
                 <a:cs typeface="Mulish" pitchFamily="34" charset="-120"/>
               </a:rPr>
-              <a:t>39</a:t>
+              <a:t>49</a:t>
             </a:r>
             <a:endParaRPr lang="en-US" sz="3400" dirty="0"/>
           </a:p>
@@ -2683,7 +2861,7 @@
                 <a:ea typeface="Calibri" pitchFamily="34" charset="-122"/>
                 <a:cs typeface="Calibri" pitchFamily="34" charset="-120"/>
               </a:rPr>
-              <a:t>skills · 12 disciplines</a:t>
+              <a:t>skills · 13 disciplines</a:t>
             </a:r>
             <a:endParaRPr lang="en-US" sz="1250" dirty="0"/>
           </a:p>
@@ -3117,7 +3295,7 @@
                 <a:ea typeface="Calibri" pitchFamily="34" charset="-122"/>
                 <a:cs typeface="Calibri" pitchFamily="34" charset="-120"/>
               </a:rPr>
-              <a:t>navi-delivery  ·  v0.1.0  ·  10 / 17</a:t>
+              <a:t>navi-delivery  ·  v0.1.0  ·  10 / 19</a:t>
             </a:r>
             <a:endParaRPr lang="en-US" sz="850" dirty="0"/>
           </a:p>
@@ -4787,7 +4965,7 @@
                 <a:ea typeface="Calibri" pitchFamily="34" charset="-122"/>
                 <a:cs typeface="Calibri" pitchFamily="34" charset="-120"/>
               </a:rPr>
-              <a:t>navi-delivery  ·  v0.1.0  ·  11 / 17</a:t>
+              <a:t>navi-delivery  ·  v0.1.0  ·  11 / 19</a:t>
             </a:r>
             <a:endParaRPr lang="en-US" sz="850" dirty="0"/>
           </a:p>
@@ -6782,7 +6960,7 @@
                 <a:ea typeface="Mulish" pitchFamily="34" charset="-122"/>
                 <a:cs typeface="Mulish" pitchFamily="34" charset="-120"/>
               </a:rPr>
-              <a:t>Seven verbs, and nothing to install but Node and Python</a:t>
+              <a:t>Eight verbs, and nothing to install but Node and Python</a:t>
             </a:r>
             <a:endParaRPr lang="en-US" sz="3100" dirty="0"/>
           </a:p>
@@ -6884,7 +7062,7 @@
                 <a:ea typeface="Calibri" pitchFamily="34" charset="-122"/>
                 <a:cs typeface="Calibri" pitchFamily="34" charset="-120"/>
               </a:rPr>
-              <a:t>navi-delivery  ·  v0.1.0  ·  12 / 17</a:t>
+              <a:t>navi-delivery  ·  v0.1.0  ·  12 / 19</a:t>
             </a:r>
             <a:endParaRPr lang="en-US" sz="850" dirty="0"/>
           </a:p>
@@ -6898,12 +7076,12 @@
         </p:nvSpPr>
         <p:spPr>
           <a:xfrm>
-            <a:off x="640080" y="1993392"/>
-            <a:ext cx="6858000" cy="457200"/>
+            <a:off x="640080" y="1956816"/>
+            <a:ext cx="6858000" cy="429768"/>
           </a:xfrm>
           <a:prstGeom prst="roundRect">
             <a:avLst>
-              <a:gd name="adj" fmla="val 12000"/>
+              <a:gd name="adj" fmla="val 12766"/>
             </a:avLst>
           </a:prstGeom>
           <a:solidFill>
@@ -6925,7 +7103,7 @@
         </p:nvSpPr>
         <p:spPr>
           <a:xfrm>
-            <a:off x="877824" y="2103120"/>
+            <a:off x="877824" y="2048256"/>
             <a:ext cx="1234440" cy="256032"/>
           </a:xfrm>
           <a:prstGeom prst="rect">
@@ -6942,7 +7120,7 @@
               <a:buNone/>
             </a:pPr>
             <a:r>
-              <a:rPr lang="en-US" sz="1300" b="1" dirty="0">
+              <a:rPr lang="en-US" sz="1250" b="1" dirty="0">
                 <a:solidFill>
                   <a:srgbClr val="FAF3E7"/>
                 </a:solidFill>
@@ -6952,7 +7130,7 @@
               </a:rPr>
               <a:t>init</a:t>
             </a:r>
-            <a:endParaRPr lang="en-US" sz="1300" dirty="0"/>
+            <a:endParaRPr lang="en-US" sz="1250" dirty="0"/>
           </a:p>
         </p:txBody>
       </p:sp>
@@ -6964,7 +7142,7 @@
         </p:nvSpPr>
         <p:spPr>
           <a:xfrm>
-            <a:off x="2212848" y="2121408"/>
+            <a:off x="2212848" y="2066544"/>
             <a:ext cx="5029200" cy="237744"/>
           </a:xfrm>
           <a:prstGeom prst="rect">
@@ -6981,7 +7159,7 @@
               <a:buNone/>
             </a:pPr>
             <a:r>
-              <a:rPr lang="en-US" sz="1050" dirty="0">
+              <a:rPr lang="en-US" sz="1000" dirty="0">
                 <a:solidFill>
                   <a:srgbClr val="E4DED3"/>
                 </a:solidFill>
@@ -6991,7 +7169,7 @@
               </a:rPr>
               <a:t>scaffold delivery/, generate AGENTS.md, detect the harness</a:t>
             </a:r>
-            <a:endParaRPr lang="en-US" sz="1050" dirty="0"/>
+            <a:endParaRPr lang="en-US" sz="1000" dirty="0"/>
           </a:p>
         </p:txBody>
       </p:sp>
@@ -7003,12 +7181,12 @@
         </p:nvSpPr>
         <p:spPr>
           <a:xfrm>
-            <a:off x="640080" y="2519172"/>
-            <a:ext cx="6858000" cy="457200"/>
+            <a:off x="640080" y="2441448"/>
+            <a:ext cx="6858000" cy="429768"/>
           </a:xfrm>
           <a:prstGeom prst="roundRect">
             <a:avLst>
-              <a:gd name="adj" fmla="val 12000"/>
+              <a:gd name="adj" fmla="val 12766"/>
             </a:avLst>
           </a:prstGeom>
           <a:solidFill>
@@ -7030,7 +7208,7 @@
         </p:nvSpPr>
         <p:spPr>
           <a:xfrm>
-            <a:off x="877824" y="2628900"/>
+            <a:off x="877824" y="2532888"/>
             <a:ext cx="1234440" cy="256032"/>
           </a:xfrm>
           <a:prstGeom prst="rect">
@@ -7047,7 +7225,7 @@
               <a:buNone/>
             </a:pPr>
             <a:r>
-              <a:rPr lang="en-US" sz="1300" b="1" dirty="0">
+              <a:rPr lang="en-US" sz="1250" b="1" dirty="0">
                 <a:solidFill>
                   <a:srgbClr val="FAF3E7"/>
                 </a:solidFill>
@@ -7057,7 +7235,7 @@
               </a:rPr>
               <a:t>propose</a:t>
             </a:r>
-            <a:endParaRPr lang="en-US" sz="1300" dirty="0"/>
+            <a:endParaRPr lang="en-US" sz="1250" dirty="0"/>
           </a:p>
         </p:txBody>
       </p:sp>
@@ -7069,7 +7247,7 @@
         </p:nvSpPr>
         <p:spPr>
           <a:xfrm>
-            <a:off x="2212848" y="2647188"/>
+            <a:off x="2212848" y="2551176"/>
             <a:ext cx="5029200" cy="237744"/>
           </a:xfrm>
           <a:prstGeom prst="rect">
@@ -7086,7 +7264,7 @@
               <a:buNone/>
             </a:pPr>
             <a:r>
-              <a:rPr lang="en-US" sz="1050" dirty="0">
+              <a:rPr lang="en-US" sz="1000" dirty="0">
                 <a:solidFill>
                   <a:srgbClr val="E4DED3"/>
                 </a:solidFill>
@@ -7096,7 +7274,7 @@
               </a:rPr>
               <a:t>open a change from templates; fix its lane</a:t>
             </a:r>
-            <a:endParaRPr lang="en-US" sz="1050" dirty="0"/>
+            <a:endParaRPr lang="en-US" sz="1000" dirty="0"/>
           </a:p>
         </p:txBody>
       </p:sp>
@@ -7108,12 +7286,12 @@
         </p:nvSpPr>
         <p:spPr>
           <a:xfrm>
-            <a:off x="640080" y="3044952"/>
-            <a:ext cx="6858000" cy="457200"/>
+            <a:off x="640080" y="2926080"/>
+            <a:ext cx="6858000" cy="429768"/>
           </a:xfrm>
           <a:prstGeom prst="roundRect">
             <a:avLst>
-              <a:gd name="adj" fmla="val 12000"/>
+              <a:gd name="adj" fmla="val 12766"/>
             </a:avLst>
           </a:prstGeom>
           <a:solidFill>
@@ -7135,7 +7313,7 @@
         </p:nvSpPr>
         <p:spPr>
           <a:xfrm>
-            <a:off x="877824" y="3154680"/>
+            <a:off x="877824" y="3017520"/>
             <a:ext cx="1234440" cy="256032"/>
           </a:xfrm>
           <a:prstGeom prst="rect">
@@ -7152,7 +7330,7 @@
               <a:buNone/>
             </a:pPr>
             <a:r>
-              <a:rPr lang="en-US" sz="1300" b="1" dirty="0">
+              <a:rPr lang="en-US" sz="1250" b="1" dirty="0">
                 <a:solidFill>
                   <a:srgbClr val="FAF3E7"/>
                 </a:solidFill>
@@ -7162,7 +7340,7 @@
               </a:rPr>
               <a:t>status</a:t>
             </a:r>
-            <a:endParaRPr lang="en-US" sz="1300" dirty="0"/>
+            <a:endParaRPr lang="en-US" sz="1250" dirty="0"/>
           </a:p>
         </p:txBody>
       </p:sp>
@@ -7174,7 +7352,7 @@
         </p:nvSpPr>
         <p:spPr>
           <a:xfrm>
-            <a:off x="2212848" y="3172968"/>
+            <a:off x="2212848" y="3035808"/>
             <a:ext cx="5029200" cy="237744"/>
           </a:xfrm>
           <a:prstGeom prst="rect">
@@ -7191,7 +7369,7 @@
               <a:buNone/>
             </a:pPr>
             <a:r>
-              <a:rPr lang="en-US" sz="1050" dirty="0">
+              <a:rPr lang="en-US" sz="1000" dirty="0">
                 <a:solidFill>
                   <a:srgbClr val="E4DED3"/>
                 </a:solidFill>
@@ -7201,7 +7379,7 @@
               </a:rPr>
               <a:t>change, lane, phase, gate verdicts, stale artifacts</a:t>
             </a:r>
-            <a:endParaRPr lang="en-US" sz="1050" dirty="0"/>
+            <a:endParaRPr lang="en-US" sz="1000" dirty="0"/>
           </a:p>
         </p:txBody>
       </p:sp>
@@ -7213,12 +7391,12 @@
         </p:nvSpPr>
         <p:spPr>
           <a:xfrm>
-            <a:off x="640080" y="3570732"/>
-            <a:ext cx="6858000" cy="457200"/>
+            <a:off x="640080" y="3410712"/>
+            <a:ext cx="6858000" cy="429768"/>
           </a:xfrm>
           <a:prstGeom prst="roundRect">
             <a:avLst>
-              <a:gd name="adj" fmla="val 12000"/>
+              <a:gd name="adj" fmla="val 12766"/>
             </a:avLst>
           </a:prstGeom>
           <a:solidFill>
@@ -7240,7 +7418,7 @@
         </p:nvSpPr>
         <p:spPr>
           <a:xfrm>
-            <a:off x="877824" y="3680460"/>
+            <a:off x="877824" y="3502152"/>
             <a:ext cx="1234440" cy="256032"/>
           </a:xfrm>
           <a:prstGeom prst="rect">
@@ -7257,7 +7435,7 @@
               <a:buNone/>
             </a:pPr>
             <a:r>
-              <a:rPr lang="en-US" sz="1300" b="1" dirty="0">
+              <a:rPr lang="en-US" sz="1250" b="1" dirty="0">
                 <a:solidFill>
                   <a:srgbClr val="FAF3E7"/>
                 </a:solidFill>
@@ -7267,7 +7445,7 @@
               </a:rPr>
               <a:t>gate</a:t>
             </a:r>
-            <a:endParaRPr lang="en-US" sz="1300" dirty="0"/>
+            <a:endParaRPr lang="en-US" sz="1250" dirty="0"/>
           </a:p>
         </p:txBody>
       </p:sp>
@@ -7279,7 +7457,7 @@
         </p:nvSpPr>
         <p:spPr>
           <a:xfrm>
-            <a:off x="2212848" y="3698748"/>
+            <a:off x="2212848" y="3520440"/>
             <a:ext cx="5029200" cy="237744"/>
           </a:xfrm>
           <a:prstGeom prst="rect">
@@ -7296,7 +7474,7 @@
               <a:buNone/>
             </a:pPr>
             <a:r>
-              <a:rPr lang="en-US" sz="1050" dirty="0">
+              <a:rPr lang="en-US" sz="1000" dirty="0">
                 <a:solidFill>
                   <a:srgbClr val="E4DED3"/>
                 </a:solidFill>
@@ -7306,7 +7484,7 @@
               </a:rPr>
               <a:t>record a verdict with an evidence path, or a waiver</a:t>
             </a:r>
-            <a:endParaRPr lang="en-US" sz="1050" dirty="0"/>
+            <a:endParaRPr lang="en-US" sz="1000" dirty="0"/>
           </a:p>
         </p:txBody>
       </p:sp>
@@ -7318,12 +7496,12 @@
         </p:nvSpPr>
         <p:spPr>
           <a:xfrm>
-            <a:off x="640080" y="4096512"/>
-            <a:ext cx="6858000" cy="457200"/>
+            <a:off x="640080" y="3895344"/>
+            <a:ext cx="6858000" cy="429768"/>
           </a:xfrm>
           <a:prstGeom prst="roundRect">
             <a:avLst>
-              <a:gd name="adj" fmla="val 12000"/>
+              <a:gd name="adj" fmla="val 12766"/>
             </a:avLst>
           </a:prstGeom>
           <a:solidFill>
@@ -7345,7 +7523,7 @@
         </p:nvSpPr>
         <p:spPr>
           <a:xfrm>
-            <a:off x="877824" y="4206240"/>
+            <a:off x="877824" y="3986784"/>
             <a:ext cx="1234440" cy="256032"/>
           </a:xfrm>
           <a:prstGeom prst="rect">
@@ -7362,7 +7540,7 @@
               <a:buNone/>
             </a:pPr>
             <a:r>
-              <a:rPr lang="en-US" sz="1300" b="1" dirty="0">
+              <a:rPr lang="en-US" sz="1250" b="1" dirty="0">
                 <a:solidFill>
                   <a:srgbClr val="FAF3E7"/>
                 </a:solidFill>
@@ -7372,7 +7550,7 @@
               </a:rPr>
               <a:t>validate</a:t>
             </a:r>
-            <a:endParaRPr lang="en-US" sz="1300" dirty="0"/>
+            <a:endParaRPr lang="en-US" sz="1250" dirty="0"/>
           </a:p>
         </p:txBody>
       </p:sp>
@@ -7384,7 +7562,7 @@
         </p:nvSpPr>
         <p:spPr>
           <a:xfrm>
-            <a:off x="2212848" y="4224528"/>
+            <a:off x="2212848" y="4005072"/>
             <a:ext cx="5029200" cy="237744"/>
           </a:xfrm>
           <a:prstGeom prst="rect">
@@ -7401,7 +7579,7 @@
               <a:buNone/>
             </a:pPr>
             <a:r>
-              <a:rPr lang="en-US" sz="1050" dirty="0">
+              <a:rPr lang="en-US" sz="1000" dirty="0">
                 <a:solidFill>
                   <a:srgbClr val="E4DED3"/>
                 </a:solidFill>
@@ -7411,7 +7589,7 @@
               </a:rPr>
               <a:t>frontmatter, the separation law, the ID chain</a:t>
             </a:r>
-            <a:endParaRPr lang="en-US" sz="1050" dirty="0"/>
+            <a:endParaRPr lang="en-US" sz="1000" dirty="0"/>
           </a:p>
         </p:txBody>
       </p:sp>
@@ -7423,12 +7601,12 @@
         </p:nvSpPr>
         <p:spPr>
           <a:xfrm>
-            <a:off x="640080" y="4622292"/>
-            <a:ext cx="6858000" cy="457200"/>
+            <a:off x="640080" y="4379976"/>
+            <a:ext cx="6858000" cy="429768"/>
           </a:xfrm>
           <a:prstGeom prst="roundRect">
             <a:avLst>
-              <a:gd name="adj" fmla="val 12000"/>
+              <a:gd name="adj" fmla="val 12766"/>
             </a:avLst>
           </a:prstGeom>
           <a:solidFill>
@@ -7450,7 +7628,7 @@
         </p:nvSpPr>
         <p:spPr>
           <a:xfrm>
-            <a:off x="877824" y="4732020"/>
+            <a:off x="877824" y="4471416"/>
             <a:ext cx="1234440" cy="256032"/>
           </a:xfrm>
           <a:prstGeom prst="rect">
@@ -7467,7 +7645,7 @@
               <a:buNone/>
             </a:pPr>
             <a:r>
-              <a:rPr lang="en-US" sz="1300" b="1" dirty="0">
+              <a:rPr lang="en-US" sz="1250" b="1" dirty="0">
                 <a:solidFill>
                   <a:srgbClr val="FAF3E7"/>
                 </a:solidFill>
@@ -7477,7 +7655,7 @@
               </a:rPr>
               <a:t>archive</a:t>
             </a:r>
-            <a:endParaRPr lang="en-US" sz="1300" dirty="0"/>
+            <a:endParaRPr lang="en-US" sz="1250" dirty="0"/>
           </a:p>
         </p:txBody>
       </p:sp>
@@ -7489,7 +7667,7 @@
         </p:nvSpPr>
         <p:spPr>
           <a:xfrm>
-            <a:off x="2212848" y="4750308"/>
+            <a:off x="2212848" y="4489704"/>
             <a:ext cx="5029200" cy="237744"/>
           </a:xfrm>
           <a:prstGeom prst="rect">
@@ -7506,7 +7684,7 @@
               <a:buNone/>
             </a:pPr>
             <a:r>
-              <a:rPr lang="en-US" sz="1050" dirty="0">
+              <a:rPr lang="en-US" sz="1000" dirty="0">
                 <a:solidFill>
                   <a:srgbClr val="E4DED3"/>
                 </a:solidFill>
@@ -7516,7 +7694,7 @@
               </a:rPr>
               <a:t>fold the delta into specs/, emit the insight stub</a:t>
             </a:r>
-            <a:endParaRPr lang="en-US" sz="1050" dirty="0"/>
+            <a:endParaRPr lang="en-US" sz="1000" dirty="0"/>
           </a:p>
         </p:txBody>
       </p:sp>
@@ -7528,12 +7706,12 @@
         </p:nvSpPr>
         <p:spPr>
           <a:xfrm>
-            <a:off x="640080" y="5148072"/>
-            <a:ext cx="6858000" cy="457200"/>
+            <a:off x="640080" y="4864608"/>
+            <a:ext cx="6858000" cy="429768"/>
           </a:xfrm>
           <a:prstGeom prst="roundRect">
             <a:avLst>
-              <a:gd name="adj" fmla="val 12000"/>
+              <a:gd name="adj" fmla="val 12766"/>
             </a:avLst>
           </a:prstGeom>
           <a:solidFill>
@@ -7555,7 +7733,7 @@
         </p:nvSpPr>
         <p:spPr>
           <a:xfrm>
-            <a:off x="877824" y="5257800"/>
+            <a:off x="877824" y="4956048"/>
             <a:ext cx="1234440" cy="256032"/>
           </a:xfrm>
           <a:prstGeom prst="rect">
@@ -7572,7 +7750,7 @@
               <a:buNone/>
             </a:pPr>
             <a:r>
-              <a:rPr lang="en-US" sz="1300" b="1" dirty="0">
+              <a:rPr lang="en-US" sz="1250" b="1" dirty="0">
                 <a:solidFill>
                   <a:srgbClr val="FAF3E7"/>
                 </a:solidFill>
@@ -7582,7 +7760,7 @@
               </a:rPr>
               <a:t>doctor</a:t>
             </a:r>
-            <a:endParaRPr lang="en-US" sz="1300" dirty="0"/>
+            <a:endParaRPr lang="en-US" sz="1250" dirty="0"/>
           </a:p>
         </p:txBody>
       </p:sp>
@@ -7594,7 +7772,7 @@
         </p:nvSpPr>
         <p:spPr>
           <a:xfrm>
-            <a:off x="2212848" y="5276088"/>
+            <a:off x="2212848" y="4974336"/>
             <a:ext cx="5029200" cy="237744"/>
           </a:xfrm>
           <a:prstGeom prst="rect">
@@ -7611,7 +7789,7 @@
               <a:buNone/>
             </a:pPr>
             <a:r>
-              <a:rPr lang="en-US" sz="1050" dirty="0">
+              <a:rPr lang="en-US" sz="1000" dirty="0">
                 <a:solidFill>
                   <a:srgbClr val="E4DED3"/>
                 </a:solidFill>
@@ -7621,13 +7799,118 @@
               </a:rPr>
               <a:t>harness detection; native vs fallback capabilities</a:t>
             </a:r>
-            <a:endParaRPr lang="en-US" sz="1050" dirty="0"/>
+            <a:endParaRPr lang="en-US" sz="1000" dirty="0"/>
           </a:p>
         </p:txBody>
       </p:sp>
       <p:sp>
         <p:nvSpPr>
           <p:cNvPr id="28" name="Shape 25"/>
+          <p:cNvSpPr/>
+          <p:nvPr/>
+        </p:nvSpPr>
+        <p:spPr>
+          <a:xfrm>
+            <a:off x="640080" y="5349240"/>
+            <a:ext cx="6858000" cy="429768"/>
+          </a:xfrm>
+          <a:prstGeom prst="roundRect">
+            <a:avLst>
+              <a:gd name="adj" fmla="val 12766"/>
+            </a:avLst>
+          </a:prstGeom>
+          <a:solidFill>
+            <a:srgbClr val="0E2470"/>
+          </a:solidFill>
+          <a:ln w="12700">
+            <a:solidFill>
+              <a:srgbClr val="0E2470"/>
+            </a:solidFill>
+            <a:prstDash val="solid"/>
+          </a:ln>
+        </p:spPr>
+      </p:sp>
+      <p:sp>
+        <p:nvSpPr>
+          <p:cNvPr id="29" name="Text 26"/>
+          <p:cNvSpPr txBox="1"/>
+          <p:nvPr/>
+        </p:nvSpPr>
+        <p:spPr>
+          <a:xfrm>
+            <a:off x="877824" y="5440680"/>
+            <a:ext cx="1234440" cy="256032"/>
+          </a:xfrm>
+          <a:prstGeom prst="rect">
+            <a:avLst/>
+          </a:prstGeom>
+          <a:noFill/>
+          <a:ln/>
+        </p:spPr>
+        <p:txBody>
+          <a:bodyPr wrap="square" lIns="0" tIns="0" rIns="0" bIns="0" rtlCol="0" anchor="ctr"/>
+          <a:lstStyle/>
+          <a:p>
+            <a:pPr indent="0" marL="0">
+              <a:buNone/>
+            </a:pPr>
+            <a:r>
+              <a:rPr lang="en-US" sz="1250" b="1" dirty="0">
+                <a:solidFill>
+                  <a:srgbClr val="FAF3E7"/>
+                </a:solidFill>
+                <a:latin typeface="Consolas" pitchFamily="34" charset="0"/>
+                <a:ea typeface="Consolas" pitchFamily="34" charset="-122"/>
+                <a:cs typeface="Consolas" pitchFamily="34" charset="-120"/>
+              </a:rPr>
+              <a:t>telemetry</a:t>
+            </a:r>
+            <a:endParaRPr lang="en-US" sz="1250" dirty="0"/>
+          </a:p>
+        </p:txBody>
+      </p:sp>
+      <p:sp>
+        <p:nvSpPr>
+          <p:cNvPr id="30" name="Text 27"/>
+          <p:cNvSpPr txBox="1"/>
+          <p:nvPr/>
+        </p:nvSpPr>
+        <p:spPr>
+          <a:xfrm>
+            <a:off x="2212848" y="5458968"/>
+            <a:ext cx="5029200" cy="237744"/>
+          </a:xfrm>
+          <a:prstGeom prst="rect">
+            <a:avLst/>
+          </a:prstGeom>
+          <a:noFill/>
+          <a:ln/>
+        </p:spPr>
+        <p:txBody>
+          <a:bodyPr wrap="square" lIns="0" tIns="0" rIns="0" bIns="0" rtlCol="0" anchor="ctr"/>
+          <a:lstStyle/>
+          <a:p>
+            <a:pPr indent="0" marL="0">
+              <a:buNone/>
+            </a:pPr>
+            <a:r>
+              <a:rPr lang="en-US" sz="1000" dirty="0">
+                <a:solidFill>
+                  <a:srgbClr val="E4DED3"/>
+                </a:solidFill>
+                <a:latin typeface="Calibri" pitchFamily="34" charset="0"/>
+                <a:ea typeface="Calibri" pitchFamily="34" charset="-122"/>
+                <a:cs typeface="Calibri" pitchFamily="34" charset="-120"/>
+              </a:rPr>
+              <a:t>export the gate ledger as OTLP traces; off until you run it</a:t>
+            </a:r>
+            <a:endParaRPr lang="en-US" sz="1000" dirty="0"/>
+          </a:p>
+        </p:txBody>
+      </p:sp>
+      <p:sp>
+        <p:nvSpPr>
+          <p:cNvPr id="31" name="Shape 28"/>
           <p:cNvSpPr/>
           <p:nvPr/>
         </p:nvSpPr>
@@ -7654,7 +7937,7 @@
       </p:sp>
       <p:sp>
         <p:nvSpPr>
-          <p:cNvPr id="29" name="Text 26"/>
+          <p:cNvPr id="32" name="Text 29"/>
           <p:cNvSpPr txBox="1"/>
           <p:nvPr/>
         </p:nvSpPr>
@@ -7693,7 +7976,7 @@
       </p:sp>
       <p:sp>
         <p:nvSpPr>
-          <p:cNvPr id="30" name="Text 27"/>
+          <p:cNvPr id="33" name="Text 30"/>
           <p:cNvSpPr txBox="1"/>
           <p:nvPr/>
         </p:nvSpPr>
@@ -7875,7 +8158,7 @@
       </p:sp>
       <p:sp>
         <p:nvSpPr>
-          <p:cNvPr id="31" name="Shape 28"/>
+          <p:cNvPr id="34" name="Shape 31"/>
           <p:cNvSpPr/>
           <p:nvPr/>
         </p:nvSpPr>
@@ -7902,7 +8185,7 @@
       </p:sp>
       <p:sp>
         <p:nvSpPr>
-          <p:cNvPr id="32" name="Text 29"/>
+          <p:cNvPr id="35" name="Text 32"/>
           <p:cNvSpPr txBox="1"/>
           <p:nvPr/>
         </p:nvSpPr>
@@ -7941,7 +8224,7 @@
       </p:sp>
       <p:sp>
         <p:nvSpPr>
-          <p:cNvPr id="33" name="Text 30"/>
+          <p:cNvPr id="36" name="Text 33"/>
           <p:cNvSpPr txBox="1"/>
           <p:nvPr/>
         </p:nvSpPr>
@@ -7983,18 +8266,18 @@
       </p:sp>
       <p:sp>
         <p:nvSpPr>
-          <p:cNvPr id="34" name="Shape 31"/>
+          <p:cNvPr id="37" name="Shape 34"/>
           <p:cNvSpPr/>
           <p:nvPr/>
         </p:nvSpPr>
         <p:spPr>
           <a:xfrm>
-            <a:off x="640080" y="5687568"/>
-            <a:ext cx="6858000" cy="512064"/>
+            <a:off x="640080" y="5897880"/>
+            <a:ext cx="6858000" cy="411480"/>
           </a:xfrm>
           <a:prstGeom prst="roundRect">
             <a:avLst>
-              <a:gd name="adj" fmla="val 10714"/>
+              <a:gd name="adj" fmla="val 13333"/>
             </a:avLst>
           </a:prstGeom>
           <a:solidFill>
@@ -8010,14 +8293,14 @@
       </p:sp>
       <p:sp>
         <p:nvSpPr>
-          <p:cNvPr id="35" name="Text 32"/>
-          <p:cNvSpPr txBox="1"/>
-          <p:nvPr/>
-        </p:nvSpPr>
-        <p:spPr>
-          <a:xfrm>
-            <a:off x="877824" y="5833872"/>
-            <a:ext cx="6400800" cy="237744"/>
+          <p:cNvPr id="38" name="Text 35"/>
+          <p:cNvSpPr txBox="1"/>
+          <p:nvPr/>
+        </p:nvSpPr>
+        <p:spPr>
+          <a:xfrm>
+            <a:off x="877824" y="6007608"/>
+            <a:ext cx="6400800" cy="219456"/>
           </a:xfrm>
           <a:prstGeom prst="rect">
             <a:avLst/>
@@ -8253,7 +8536,7 @@
                 <a:ea typeface="Calibri" pitchFamily="34" charset="-122"/>
                 <a:cs typeface="Calibri" pitchFamily="34" charset="-120"/>
               </a:rPr>
-              <a:t>navi-delivery  ·  v0.1.0  ·  13 / 17</a:t>
+              <a:t>navi-delivery  ·  v0.1.0  ·  13 / 19</a:t>
             </a:r>
             <a:endParaRPr lang="en-US" sz="850" dirty="0"/>
           </a:p>
@@ -9788,7 +10071,7 @@
                 <a:ea typeface="Calibri" pitchFamily="34" charset="-122"/>
                 <a:cs typeface="Calibri" pitchFamily="34" charset="-120"/>
               </a:rPr>
-              <a:t>navi-delivery  ·  v0.1.0  ·  14 / 17</a:t>
+              <a:t>navi-delivery  ·  v0.1.0  ·  14 / 19</a:t>
             </a:r>
             <a:endParaRPr lang="en-US" sz="850" dirty="0"/>
           </a:p>
@@ -10960,7 +11243,7 @@
                 <a:ea typeface="Calibri" pitchFamily="34" charset="-122"/>
                 <a:cs typeface="Calibri" pitchFamily="34" charset="-120"/>
               </a:rPr>
-              <a:t>navi-delivery  ·  v0.1.0  ·  15 / 17</a:t>
+              <a:t>navi-delivery  ·  v0.1.0  ·  15 / 19</a:t>
             </a:r>
             <a:endParaRPr lang="en-US" sz="850" dirty="0"/>
           </a:p>
@@ -11649,7 +11932,7 @@
                 <a:ea typeface="Mulish" pitchFamily="34" charset="-122"/>
                 <a:cs typeface="Mulish" pitchFamily="34" charset="-120"/>
               </a:rPr>
-              <a:t>Five minutes from clone to first proposal</a:t>
+              <a:t>Five minutes to a first proposal</a:t>
             </a:r>
             <a:endParaRPr lang="en-US" sz="3100" dirty="0"/>
           </a:p>
@@ -11751,7 +12034,7 @@
                 <a:ea typeface="Calibri" pitchFamily="34" charset="-122"/>
                 <a:cs typeface="Calibri" pitchFamily="34" charset="-120"/>
               </a:rPr>
-              <a:t>navi-delivery  ·  v0.1.0  ·  16 / 17</a:t>
+              <a:t>navi-delivery  ·  v0.1.0  ·  16 / 19</a:t>
             </a:r>
             <a:endParaRPr lang="en-US" sz="850" dirty="0"/>
           </a:p>
@@ -11856,7 +12139,7 @@
                 <a:ea typeface="Mulish" pitchFamily="34" charset="-122"/>
                 <a:cs typeface="Mulish" pitchFamily="34" charset="-120"/>
               </a:rPr>
-              <a:t>Install the agents and skills</a:t>
+              <a:t>Add the marketplace</a:t>
             </a:r>
             <a:endParaRPr lang="en-US" sz="1200" dirty="0"/>
           </a:p>
@@ -11895,7 +12178,7 @@
                 <a:ea typeface="Consolas" pitchFamily="34" charset="-122"/>
                 <a:cs typeface="Consolas" pitchFamily="34" charset="-120"/>
               </a:rPr>
-              <a:t>./install.sh --yes</a:t>
+              <a:t>/plugin marketplace add navikenz/navi-delivery</a:t>
             </a:r>
             <a:endParaRPr lang="en-US" sz="1050" dirty="0"/>
           </a:p>
@@ -11937,7 +12220,7 @@
                 <a:ea typeface="Calibri" pitchFamily="34" charset="-122"/>
                 <a:cs typeface="Calibri" pitchFamily="34" charset="-120"/>
               </a:rPr>
-              <a:t>→ Installed 39 skill(s) and 11 agent(s).</a:t>
+              <a:t>→ the preferred way in — 49 skills and 11 agents, with no clone</a:t>
             </a:r>
             <a:endParaRPr lang="en-US" sz="900" dirty="0"/>
           </a:p>
@@ -12042,7 +12325,7 @@
                 <a:ea typeface="Mulish" pitchFamily="34" charset="-122"/>
                 <a:cs typeface="Mulish" pitchFamily="34" charset="-120"/>
               </a:rPr>
-              <a:t>Put the CLI on your PATH</a:t>
+              <a:t>Install the plugin</a:t>
             </a:r>
             <a:endParaRPr lang="en-US" sz="1200" dirty="0"/>
           </a:p>
@@ -12081,7 +12364,7 @@
                 <a:ea typeface="Consolas" pitchFamily="34" charset="-122"/>
                 <a:cs typeface="Consolas" pitchFamily="34" charset="-120"/>
               </a:rPr>
-              <a:t>npm install --global .</a:t>
+              <a:t>/plugin install navi-delivery@navi-delivery</a:t>
             </a:r>
             <a:endParaRPr lang="en-US" sz="1050" dirty="0"/>
           </a:p>
@@ -12123,7 +12406,7 @@
                 <a:ea typeface="Calibri" pitchFamily="34" charset="-122"/>
                 <a:cs typeface="Calibri" pitchFamily="34" charset="-120"/>
               </a:rPr>
-              <a:t>→ added 1 package</a:t>
+              <a:t>→ ./install.sh --yes does the same job from a clone</a:t>
             </a:r>
             <a:endParaRPr lang="en-US" sz="900" dirty="0"/>
           </a:p>
@@ -12581,6 +12864,2730 @@
 <file path=ppt/slides/slide17.xml><?xml version="1.0" encoding="utf-8"?>
 <p:sld xmlns:a="http://schemas.openxmlformats.org/drawingml/2006/main" xmlns:r="http://schemas.openxmlformats.org/officeDocument/2006/relationships" xmlns:p="http://schemas.openxmlformats.org/presentationml/2006/main">
   <p:cSld name="Slide 17">
+    <p:bg>
+      <p:bgPr>
+        <a:solidFill>
+          <a:srgbClr val="FAF3E7"/>
+        </a:solidFill>
+      </p:bgPr>
+    </p:bg>
+    <p:spTree>
+      <p:nvGrpSpPr>
+        <p:cNvPr id="1" name=""/>
+        <p:cNvGrpSpPr/>
+        <p:nvPr/>
+      </p:nvGrpSpPr>
+      <p:grpSpPr>
+        <a:xfrm>
+          <a:off x="0" y="0"/>
+          <a:ext cx="0" cy="0"/>
+          <a:chOff x="0" y="0"/>
+          <a:chExt cx="0" cy="0"/>
+        </a:xfrm>
+      </p:grpSpPr>
+      <p:sp>
+        <p:nvSpPr>
+          <p:cNvPr id="2" name="Text 0"/>
+          <p:cNvSpPr txBox="1"/>
+          <p:nvPr/>
+        </p:nvSpPr>
+        <p:spPr>
+          <a:xfrm>
+            <a:off x="640080" y="402336"/>
+            <a:ext cx="10911535" cy="219456"/>
+          </a:xfrm>
+          <a:prstGeom prst="rect">
+            <a:avLst/>
+          </a:prstGeom>
+          <a:noFill/>
+          <a:ln/>
+        </p:spPr>
+        <p:txBody>
+          <a:bodyPr wrap="square" lIns="0" tIns="0" rIns="0" bIns="0" rtlCol="0" anchor="ctr"/>
+          <a:lstStyle/>
+          <a:p>
+            <a:pPr indent="0" marL="0">
+              <a:buNone/>
+            </a:pPr>
+            <a:r>
+              <a:rPr lang="en-US" sz="1000" b="1" spc="200" kern="0" dirty="0">
+                <a:solidFill>
+                  <a:srgbClr val="5F6476"/>
+                </a:solidFill>
+                <a:latin typeface="Calibri" pitchFamily="34" charset="0"/>
+                <a:ea typeface="Calibri" pitchFamily="34" charset="-122"/>
+                <a:cs typeface="Calibri" pitchFamily="34" charset="-120"/>
+              </a:rPr>
+              <a:t>OUTSIDE THE REPOSITORY</a:t>
+            </a:r>
+            <a:endParaRPr lang="en-US" sz="1000" dirty="0"/>
+          </a:p>
+        </p:txBody>
+      </p:sp>
+      <p:sp>
+        <p:nvSpPr>
+          <p:cNvPr id="3" name="Text 1"/>
+          <p:cNvSpPr txBox="1"/>
+          <p:nvPr/>
+        </p:nvSpPr>
+        <p:spPr>
+          <a:xfrm>
+            <a:off x="640080" y="676656"/>
+            <a:ext cx="10911535" cy="566928"/>
+          </a:xfrm>
+          <a:prstGeom prst="rect">
+            <a:avLst/>
+          </a:prstGeom>
+          <a:noFill/>
+          <a:ln/>
+        </p:spPr>
+        <p:txBody>
+          <a:bodyPr wrap="square" lIns="0" tIns="0" rIns="0" bIns="0" rtlCol="0" anchor="t"/>
+          <a:lstStyle/>
+          <a:p>
+            <a:pPr indent="0" marL="0">
+              <a:buNone/>
+            </a:pPr>
+            <a:r>
+              <a:rPr lang="en-US" sz="3100" b="1" dirty="0">
+                <a:solidFill>
+                  <a:srgbClr val="051D60"/>
+                </a:solidFill>
+                <a:latin typeface="Mulish" pitchFamily="34" charset="0"/>
+                <a:ea typeface="Mulish" pitchFamily="34" charset="-122"/>
+                <a:cs typeface="Mulish" pitchFamily="34" charset="-120"/>
+              </a:rPr>
+              <a:t>Connecting to the tracker, without a token in the shell</a:t>
+            </a:r>
+            <a:endParaRPr lang="en-US" sz="3100" dirty="0"/>
+          </a:p>
+        </p:txBody>
+      </p:sp>
+      <p:sp>
+        <p:nvSpPr>
+          <p:cNvPr id="4" name="Text 2"/>
+          <p:cNvSpPr txBox="1"/>
+          <p:nvPr/>
+        </p:nvSpPr>
+        <p:spPr>
+          <a:xfrm>
+            <a:off x="640080" y="1280160"/>
+            <a:ext cx="10424160" cy="329184"/>
+          </a:xfrm>
+          <a:prstGeom prst="rect">
+            <a:avLst/>
+          </a:prstGeom>
+          <a:noFill/>
+          <a:ln/>
+        </p:spPr>
+        <p:txBody>
+          <a:bodyPr wrap="square" lIns="0" tIns="0" rIns="0" bIns="0" rtlCol="0" anchor="t"/>
+          <a:lstStyle/>
+          <a:p>
+            <a:pPr indent="0" marL="0">
+              <a:buNone/>
+            </a:pPr>
+            <a:r>
+              <a:rPr lang="en-US" sz="1350" dirty="0">
+                <a:solidFill>
+                  <a:srgbClr val="5F6476"/>
+                </a:solidFill>
+                <a:latin typeface="Calibri" pitchFamily="34" charset="0"/>
+                <a:ea typeface="Calibri" pitchFamily="34" charset="-122"/>
+                <a:cs typeface="Calibri" pitchFamily="34" charset="-120"/>
+              </a:rPr>
+              <a:t>Two skills reach past the repo. Both prefer an MCP server, because the server holds the credential.</a:t>
+            </a:r>
+            <a:endParaRPr lang="en-US" sz="1350" dirty="0"/>
+          </a:p>
+        </p:txBody>
+      </p:sp>
+      <p:pic>
+        <p:nvPicPr>
+          <p:cNvPr id="5" name="Image 0" descr="preencoded.png">    </p:cNvPr>
+          <p:cNvPicPr>
+            <a:picLocks noChangeAspect="1"/>
+          </p:cNvPicPr>
+          <p:nvPr/>
+        </p:nvPicPr>
+        <p:blipFill>
+          <a:blip r:embed="rId1"/>
+          <a:stretch>
+            <a:fillRect/>
+          </a:stretch>
+        </p:blipFill>
+        <p:spPr>
+          <a:xfrm>
+            <a:off x="10637215" y="6382512"/>
+            <a:ext cx="914400" cy="126124"/>
+          </a:xfrm>
+          <a:prstGeom prst="rect">
+            <a:avLst/>
+          </a:prstGeom>
+        </p:spPr>
+      </p:pic>
+      <p:sp>
+        <p:nvSpPr>
+          <p:cNvPr id="6" name="Text 3"/>
+          <p:cNvSpPr txBox="1"/>
+          <p:nvPr/>
+        </p:nvSpPr>
+        <p:spPr>
+          <a:xfrm>
+            <a:off x="640080" y="6364224"/>
+            <a:ext cx="4572000" cy="201168"/>
+          </a:xfrm>
+          <a:prstGeom prst="rect">
+            <a:avLst/>
+          </a:prstGeom>
+          <a:noFill/>
+          <a:ln/>
+        </p:spPr>
+        <p:txBody>
+          <a:bodyPr wrap="square" lIns="0" tIns="0" rIns="0" bIns="0" rtlCol="0" anchor="ctr"/>
+          <a:lstStyle/>
+          <a:p>
+            <a:pPr indent="0" marL="0">
+              <a:buNone/>
+            </a:pPr>
+            <a:r>
+              <a:rPr lang="en-US" sz="850" dirty="0">
+                <a:solidFill>
+                  <a:srgbClr val="8D8578"/>
+                </a:solidFill>
+                <a:latin typeface="Calibri" pitchFamily="34" charset="0"/>
+                <a:ea typeface="Calibri" pitchFamily="34" charset="-122"/>
+                <a:cs typeface="Calibri" pitchFamily="34" charset="-120"/>
+              </a:rPr>
+              <a:t>navi-delivery  ·  v0.1.0  ·  17 / 19</a:t>
+            </a:r>
+            <a:endParaRPr lang="en-US" sz="850" dirty="0"/>
+          </a:p>
+        </p:txBody>
+      </p:sp>
+      <p:sp>
+        <p:nvSpPr>
+          <p:cNvPr id="7" name="Text 4"/>
+          <p:cNvSpPr txBox="1"/>
+          <p:nvPr/>
+        </p:nvSpPr>
+        <p:spPr>
+          <a:xfrm>
+            <a:off x="640080" y="1847088"/>
+            <a:ext cx="6355080" cy="256032"/>
+          </a:xfrm>
+          <a:prstGeom prst="rect">
+            <a:avLst/>
+          </a:prstGeom>
+          <a:noFill/>
+          <a:ln/>
+        </p:spPr>
+        <p:txBody>
+          <a:bodyPr wrap="square" lIns="0" tIns="0" rIns="0" bIns="0" rtlCol="0" anchor="ctr"/>
+          <a:lstStyle/>
+          <a:p>
+            <a:pPr indent="0" marL="0">
+              <a:buNone/>
+            </a:pPr>
+            <a:r>
+              <a:rPr lang="en-US" sz="1300" b="1" dirty="0">
+                <a:solidFill>
+                  <a:srgbClr val="051D60"/>
+                </a:solidFill>
+                <a:latin typeface="Mulish" pitchFamily="34" charset="0"/>
+                <a:ea typeface="Mulish" pitchFamily="34" charset="-122"/>
+                <a:cs typeface="Mulish" pitchFamily="34" charset="-120"/>
+              </a:rPr>
+              <a:t>config/mcp/ — five connection files, ready to install</a:t>
+            </a:r>
+            <a:endParaRPr lang="en-US" sz="1300" dirty="0"/>
+          </a:p>
+        </p:txBody>
+      </p:sp>
+      <p:sp>
+        <p:nvSpPr>
+          <p:cNvPr id="8" name="Shape 5"/>
+          <p:cNvSpPr/>
+          <p:nvPr/>
+        </p:nvSpPr>
+        <p:spPr>
+          <a:xfrm>
+            <a:off x="640080" y="2212848"/>
+            <a:ext cx="6355080" cy="438912"/>
+          </a:xfrm>
+          <a:prstGeom prst="roundRect">
+            <a:avLst>
+              <a:gd name="adj" fmla="val 12500"/>
+            </a:avLst>
+          </a:prstGeom>
+          <a:solidFill>
+            <a:srgbClr val="FFFFFF"/>
+          </a:solidFill>
+          <a:ln w="12700">
+            <a:solidFill>
+              <a:srgbClr val="CFC7B8"/>
+            </a:solidFill>
+            <a:prstDash val="solid"/>
+          </a:ln>
+        </p:spPr>
+      </p:sp>
+      <p:sp>
+        <p:nvSpPr>
+          <p:cNvPr id="9" name="Text 6"/>
+          <p:cNvSpPr txBox="1"/>
+          <p:nvPr/>
+        </p:nvSpPr>
+        <p:spPr>
+          <a:xfrm>
+            <a:off x="859536" y="2331720"/>
+            <a:ext cx="1463040" cy="237744"/>
+          </a:xfrm>
+          <a:prstGeom prst="rect">
+            <a:avLst/>
+          </a:prstGeom>
+          <a:noFill/>
+          <a:ln/>
+        </p:spPr>
+        <p:txBody>
+          <a:bodyPr wrap="square" lIns="0" tIns="0" rIns="0" bIns="0" rtlCol="0" anchor="ctr"/>
+          <a:lstStyle/>
+          <a:p>
+            <a:pPr indent="0" marL="0">
+              <a:buNone/>
+            </a:pPr>
+            <a:r>
+              <a:rPr lang="en-US" sz="1100" b="1" dirty="0">
+                <a:solidFill>
+                  <a:srgbClr val="051D60"/>
+                </a:solidFill>
+                <a:latin typeface="Calibri" pitchFamily="34" charset="0"/>
+                <a:ea typeface="Calibri" pitchFamily="34" charset="-122"/>
+                <a:cs typeface="Calibri" pitchFamily="34" charset="-120"/>
+              </a:rPr>
+              <a:t>Atlassian</a:t>
+            </a:r>
+            <a:endParaRPr lang="en-US" sz="1100" dirty="0"/>
+          </a:p>
+        </p:txBody>
+      </p:sp>
+      <p:sp>
+        <p:nvSpPr>
+          <p:cNvPr id="10" name="Text 7"/>
+          <p:cNvSpPr txBox="1"/>
+          <p:nvPr/>
+        </p:nvSpPr>
+        <p:spPr>
+          <a:xfrm>
+            <a:off x="2377440" y="2340864"/>
+            <a:ext cx="1600200" cy="219456"/>
+          </a:xfrm>
+          <a:prstGeom prst="rect">
+            <a:avLst/>
+          </a:prstGeom>
+          <a:noFill/>
+          <a:ln/>
+        </p:spPr>
+        <p:txBody>
+          <a:bodyPr wrap="square" lIns="0" tIns="0" rIns="0" bIns="0" rtlCol="0" anchor="ctr"/>
+          <a:lstStyle/>
+          <a:p>
+            <a:pPr indent="0" marL="0">
+              <a:buNone/>
+            </a:pPr>
+            <a:r>
+              <a:rPr lang="en-US" sz="950" dirty="0">
+                <a:solidFill>
+                  <a:srgbClr val="5F6476"/>
+                </a:solidFill>
+                <a:latin typeface="Calibri" pitchFamily="34" charset="0"/>
+                <a:ea typeface="Calibri" pitchFamily="34" charset="-122"/>
+                <a:cs typeface="Calibri" pitchFamily="34" charset="-120"/>
+              </a:rPr>
+              <a:t>hosted, OAuth as you</a:t>
+            </a:r>
+            <a:endParaRPr lang="en-US" sz="950" dirty="0"/>
+          </a:p>
+        </p:txBody>
+      </p:sp>
+      <p:sp>
+        <p:nvSpPr>
+          <p:cNvPr id="11" name="Text 8"/>
+          <p:cNvSpPr txBox="1"/>
+          <p:nvPr/>
+        </p:nvSpPr>
+        <p:spPr>
+          <a:xfrm>
+            <a:off x="4041648" y="2340864"/>
+            <a:ext cx="2734056" cy="219456"/>
+          </a:xfrm>
+          <a:prstGeom prst="rect">
+            <a:avLst/>
+          </a:prstGeom>
+          <a:noFill/>
+          <a:ln/>
+        </p:spPr>
+        <p:txBody>
+          <a:bodyPr wrap="square" lIns="0" tIns="0" rIns="0" bIns="0" rtlCol="0" anchor="ctr"/>
+          <a:lstStyle/>
+          <a:p>
+            <a:pPr indent="0" marL="0">
+              <a:buNone/>
+            </a:pPr>
+            <a:r>
+              <a:rPr lang="en-US" sz="950" dirty="0">
+                <a:solidFill>
+                  <a:srgbClr val="192954"/>
+                </a:solidFill>
+                <a:latin typeface="Consolas" pitchFamily="34" charset="0"/>
+                <a:ea typeface="Consolas" pitchFamily="34" charset="-122"/>
+                <a:cs typeface="Consolas" pitchFamily="34" charset="-120"/>
+              </a:rPr>
+              <a:t>mcp.atlassian.com/v2/mcp</a:t>
+            </a:r>
+            <a:endParaRPr lang="en-US" sz="950" dirty="0"/>
+          </a:p>
+        </p:txBody>
+      </p:sp>
+      <p:sp>
+        <p:nvSpPr>
+          <p:cNvPr id="12" name="Shape 9"/>
+          <p:cNvSpPr/>
+          <p:nvPr/>
+        </p:nvSpPr>
+        <p:spPr>
+          <a:xfrm>
+            <a:off x="640080" y="2724912"/>
+            <a:ext cx="6355080" cy="438912"/>
+          </a:xfrm>
+          <a:prstGeom prst="roundRect">
+            <a:avLst>
+              <a:gd name="adj" fmla="val 12500"/>
+            </a:avLst>
+          </a:prstGeom>
+          <a:solidFill>
+            <a:srgbClr val="F1E9DA"/>
+          </a:solidFill>
+          <a:ln w="12700">
+            <a:solidFill>
+              <a:srgbClr val="CFC7B8"/>
+            </a:solidFill>
+            <a:prstDash val="solid"/>
+          </a:ln>
+        </p:spPr>
+      </p:sp>
+      <p:sp>
+        <p:nvSpPr>
+          <p:cNvPr id="13" name="Text 10"/>
+          <p:cNvSpPr txBox="1"/>
+          <p:nvPr/>
+        </p:nvSpPr>
+        <p:spPr>
+          <a:xfrm>
+            <a:off x="859536" y="2843784"/>
+            <a:ext cx="1463040" cy="237744"/>
+          </a:xfrm>
+          <a:prstGeom prst="rect">
+            <a:avLst/>
+          </a:prstGeom>
+          <a:noFill/>
+          <a:ln/>
+        </p:spPr>
+        <p:txBody>
+          <a:bodyPr wrap="square" lIns="0" tIns="0" rIns="0" bIns="0" rtlCol="0" anchor="ctr"/>
+          <a:lstStyle/>
+          <a:p>
+            <a:pPr indent="0" marL="0">
+              <a:buNone/>
+            </a:pPr>
+            <a:r>
+              <a:rPr lang="en-US" sz="1100" b="1" dirty="0">
+                <a:solidFill>
+                  <a:srgbClr val="051D60"/>
+                </a:solidFill>
+                <a:latin typeface="Calibri" pitchFamily="34" charset="0"/>
+                <a:ea typeface="Calibri" pitchFamily="34" charset="-122"/>
+                <a:cs typeface="Calibri" pitchFamily="34" charset="-120"/>
+              </a:rPr>
+              <a:t>Atlassian</a:t>
+            </a:r>
+            <a:endParaRPr lang="en-US" sz="1100" dirty="0"/>
+          </a:p>
+        </p:txBody>
+      </p:sp>
+      <p:sp>
+        <p:nvSpPr>
+          <p:cNvPr id="14" name="Text 11"/>
+          <p:cNvSpPr txBox="1"/>
+          <p:nvPr/>
+        </p:nvSpPr>
+        <p:spPr>
+          <a:xfrm>
+            <a:off x="2377440" y="2852928"/>
+            <a:ext cx="1600200" cy="219456"/>
+          </a:xfrm>
+          <a:prstGeom prst="rect">
+            <a:avLst/>
+          </a:prstGeom>
+          <a:noFill/>
+          <a:ln/>
+        </p:spPr>
+        <p:txBody>
+          <a:bodyPr wrap="square" lIns="0" tIns="0" rIns="0" bIns="0" rtlCol="0" anchor="ctr"/>
+          <a:lstStyle/>
+          <a:p>
+            <a:pPr indent="0" marL="0">
+              <a:buNone/>
+            </a:pPr>
+            <a:r>
+              <a:rPr lang="en-US" sz="950" dirty="0">
+                <a:solidFill>
+                  <a:srgbClr val="5F6476"/>
+                </a:solidFill>
+                <a:latin typeface="Calibri" pitchFamily="34" charset="0"/>
+                <a:ea typeface="Calibri" pitchFamily="34" charset="-122"/>
+                <a:cs typeface="Calibri" pitchFamily="34" charset="-120"/>
+              </a:rPr>
+              <a:t>local, API token</a:t>
+            </a:r>
+            <a:endParaRPr lang="en-US" sz="950" dirty="0"/>
+          </a:p>
+        </p:txBody>
+      </p:sp>
+      <p:sp>
+        <p:nvSpPr>
+          <p:cNvPr id="15" name="Text 12"/>
+          <p:cNvSpPr txBox="1"/>
+          <p:nvPr/>
+        </p:nvSpPr>
+        <p:spPr>
+          <a:xfrm>
+            <a:off x="4041648" y="2852928"/>
+            <a:ext cx="2734056" cy="219456"/>
+          </a:xfrm>
+          <a:prstGeom prst="rect">
+            <a:avLst/>
+          </a:prstGeom>
+          <a:noFill/>
+          <a:ln/>
+        </p:spPr>
+        <p:txBody>
+          <a:bodyPr wrap="square" lIns="0" tIns="0" rIns="0" bIns="0" rtlCol="0" anchor="ctr"/>
+          <a:lstStyle/>
+          <a:p>
+            <a:pPr indent="0" marL="0">
+              <a:buNone/>
+            </a:pPr>
+            <a:r>
+              <a:rPr lang="en-US" sz="950" dirty="0">
+                <a:solidFill>
+                  <a:srgbClr val="192954"/>
+                </a:solidFill>
+                <a:latin typeface="Consolas" pitchFamily="34" charset="0"/>
+                <a:ea typeface="Consolas" pitchFamily="34" charset="-122"/>
+                <a:cs typeface="Consolas" pitchFamily="34" charset="-120"/>
+              </a:rPr>
+              <a:t>uvx mcp-atlassian</a:t>
+            </a:r>
+            <a:endParaRPr lang="en-US" sz="950" dirty="0"/>
+          </a:p>
+        </p:txBody>
+      </p:sp>
+      <p:sp>
+        <p:nvSpPr>
+          <p:cNvPr id="16" name="Shape 13"/>
+          <p:cNvSpPr/>
+          <p:nvPr/>
+        </p:nvSpPr>
+        <p:spPr>
+          <a:xfrm>
+            <a:off x="640080" y="3236976"/>
+            <a:ext cx="6355080" cy="438912"/>
+          </a:xfrm>
+          <a:prstGeom prst="roundRect">
+            <a:avLst>
+              <a:gd name="adj" fmla="val 12500"/>
+            </a:avLst>
+          </a:prstGeom>
+          <a:solidFill>
+            <a:srgbClr val="FFFFFF"/>
+          </a:solidFill>
+          <a:ln w="12700">
+            <a:solidFill>
+              <a:srgbClr val="CFC7B8"/>
+            </a:solidFill>
+            <a:prstDash val="solid"/>
+          </a:ln>
+        </p:spPr>
+      </p:sp>
+      <p:sp>
+        <p:nvSpPr>
+          <p:cNvPr id="17" name="Text 14"/>
+          <p:cNvSpPr txBox="1"/>
+          <p:nvPr/>
+        </p:nvSpPr>
+        <p:spPr>
+          <a:xfrm>
+            <a:off x="859536" y="3355848"/>
+            <a:ext cx="1463040" cy="237744"/>
+          </a:xfrm>
+          <a:prstGeom prst="rect">
+            <a:avLst/>
+          </a:prstGeom>
+          <a:noFill/>
+          <a:ln/>
+        </p:spPr>
+        <p:txBody>
+          <a:bodyPr wrap="square" lIns="0" tIns="0" rIns="0" bIns="0" rtlCol="0" anchor="ctr"/>
+          <a:lstStyle/>
+          <a:p>
+            <a:pPr indent="0" marL="0">
+              <a:buNone/>
+            </a:pPr>
+            <a:r>
+              <a:rPr lang="en-US" sz="1100" b="1" dirty="0">
+                <a:solidFill>
+                  <a:srgbClr val="051D60"/>
+                </a:solidFill>
+                <a:latin typeface="Calibri" pitchFamily="34" charset="0"/>
+                <a:ea typeface="Calibri" pitchFamily="34" charset="-122"/>
+                <a:cs typeface="Calibri" pitchFamily="34" charset="-120"/>
+              </a:rPr>
+              <a:t>Azure DevOps</a:t>
+            </a:r>
+            <a:endParaRPr lang="en-US" sz="1100" dirty="0"/>
+          </a:p>
+        </p:txBody>
+      </p:sp>
+      <p:sp>
+        <p:nvSpPr>
+          <p:cNvPr id="18" name="Text 15"/>
+          <p:cNvSpPr txBox="1"/>
+          <p:nvPr/>
+        </p:nvSpPr>
+        <p:spPr>
+          <a:xfrm>
+            <a:off x="2377440" y="3364992"/>
+            <a:ext cx="1600200" cy="219456"/>
+          </a:xfrm>
+          <a:prstGeom prst="rect">
+            <a:avLst/>
+          </a:prstGeom>
+          <a:noFill/>
+          <a:ln/>
+        </p:spPr>
+        <p:txBody>
+          <a:bodyPr wrap="square" lIns="0" tIns="0" rIns="0" bIns="0" rtlCol="0" anchor="ctr"/>
+          <a:lstStyle/>
+          <a:p>
+            <a:pPr indent="0" marL="0">
+              <a:buNone/>
+            </a:pPr>
+            <a:r>
+              <a:rPr lang="en-US" sz="950" dirty="0">
+                <a:solidFill>
+                  <a:srgbClr val="5F6476"/>
+                </a:solidFill>
+                <a:latin typeface="Calibri" pitchFamily="34" charset="0"/>
+                <a:ea typeface="Calibri" pitchFamily="34" charset="-122"/>
+                <a:cs typeface="Calibri" pitchFamily="34" charset="-120"/>
+              </a:rPr>
+              <a:t>local, your az login</a:t>
+            </a:r>
+            <a:endParaRPr lang="en-US" sz="950" dirty="0"/>
+          </a:p>
+        </p:txBody>
+      </p:sp>
+      <p:sp>
+        <p:nvSpPr>
+          <p:cNvPr id="19" name="Text 16"/>
+          <p:cNvSpPr txBox="1"/>
+          <p:nvPr/>
+        </p:nvSpPr>
+        <p:spPr>
+          <a:xfrm>
+            <a:off x="4041648" y="3364992"/>
+            <a:ext cx="2734056" cy="219456"/>
+          </a:xfrm>
+          <a:prstGeom prst="rect">
+            <a:avLst/>
+          </a:prstGeom>
+          <a:noFill/>
+          <a:ln/>
+        </p:spPr>
+        <p:txBody>
+          <a:bodyPr wrap="square" lIns="0" tIns="0" rIns="0" bIns="0" rtlCol="0" anchor="ctr"/>
+          <a:lstStyle/>
+          <a:p>
+            <a:pPr indent="0" marL="0">
+              <a:buNone/>
+            </a:pPr>
+            <a:r>
+              <a:rPr lang="en-US" sz="950" dirty="0">
+                <a:solidFill>
+                  <a:srgbClr val="192954"/>
+                </a:solidFill>
+                <a:latin typeface="Consolas" pitchFamily="34" charset="0"/>
+                <a:ea typeface="Consolas" pitchFamily="34" charset="-122"/>
+                <a:cs typeface="Consolas" pitchFamily="34" charset="-120"/>
+              </a:rPr>
+              <a:t>npx @azure-devops/mcp</a:t>
+            </a:r>
+            <a:endParaRPr lang="en-US" sz="950" dirty="0"/>
+          </a:p>
+        </p:txBody>
+      </p:sp>
+      <p:sp>
+        <p:nvSpPr>
+          <p:cNvPr id="20" name="Shape 17"/>
+          <p:cNvSpPr/>
+          <p:nvPr/>
+        </p:nvSpPr>
+        <p:spPr>
+          <a:xfrm>
+            <a:off x="640080" y="3749040"/>
+            <a:ext cx="6355080" cy="438912"/>
+          </a:xfrm>
+          <a:prstGeom prst="roundRect">
+            <a:avLst>
+              <a:gd name="adj" fmla="val 12500"/>
+            </a:avLst>
+          </a:prstGeom>
+          <a:solidFill>
+            <a:srgbClr val="F1E9DA"/>
+          </a:solidFill>
+          <a:ln w="12700">
+            <a:solidFill>
+              <a:srgbClr val="CFC7B8"/>
+            </a:solidFill>
+            <a:prstDash val="solid"/>
+          </a:ln>
+        </p:spPr>
+      </p:sp>
+      <p:sp>
+        <p:nvSpPr>
+          <p:cNvPr id="21" name="Text 18"/>
+          <p:cNvSpPr txBox="1"/>
+          <p:nvPr/>
+        </p:nvSpPr>
+        <p:spPr>
+          <a:xfrm>
+            <a:off x="859536" y="3867912"/>
+            <a:ext cx="1463040" cy="237744"/>
+          </a:xfrm>
+          <a:prstGeom prst="rect">
+            <a:avLst/>
+          </a:prstGeom>
+          <a:noFill/>
+          <a:ln/>
+        </p:spPr>
+        <p:txBody>
+          <a:bodyPr wrap="square" lIns="0" tIns="0" rIns="0" bIns="0" rtlCol="0" anchor="ctr"/>
+          <a:lstStyle/>
+          <a:p>
+            <a:pPr indent="0" marL="0">
+              <a:buNone/>
+            </a:pPr>
+            <a:r>
+              <a:rPr lang="en-US" sz="1100" b="1" dirty="0">
+                <a:solidFill>
+                  <a:srgbClr val="051D60"/>
+                </a:solidFill>
+                <a:latin typeface="Calibri" pitchFamily="34" charset="0"/>
+                <a:ea typeface="Calibri" pitchFamily="34" charset="-122"/>
+                <a:cs typeface="Calibri" pitchFamily="34" charset="-120"/>
+              </a:rPr>
+              <a:t>GitHub</a:t>
+            </a:r>
+            <a:endParaRPr lang="en-US" sz="1100" dirty="0"/>
+          </a:p>
+        </p:txBody>
+      </p:sp>
+      <p:sp>
+        <p:nvSpPr>
+          <p:cNvPr id="22" name="Text 19"/>
+          <p:cNvSpPr txBox="1"/>
+          <p:nvPr/>
+        </p:nvSpPr>
+        <p:spPr>
+          <a:xfrm>
+            <a:off x="2377440" y="3877056"/>
+            <a:ext cx="1600200" cy="219456"/>
+          </a:xfrm>
+          <a:prstGeom prst="rect">
+            <a:avLst/>
+          </a:prstGeom>
+          <a:noFill/>
+          <a:ln/>
+        </p:spPr>
+        <p:txBody>
+          <a:bodyPr wrap="square" lIns="0" tIns="0" rIns="0" bIns="0" rtlCol="0" anchor="ctr"/>
+          <a:lstStyle/>
+          <a:p>
+            <a:pPr indent="0" marL="0">
+              <a:buNone/>
+            </a:pPr>
+            <a:r>
+              <a:rPr lang="en-US" sz="950" dirty="0">
+                <a:solidFill>
+                  <a:srgbClr val="5F6476"/>
+                </a:solidFill>
+                <a:latin typeface="Calibri" pitchFamily="34" charset="0"/>
+                <a:ea typeface="Calibri" pitchFamily="34" charset="-122"/>
+                <a:cs typeface="Calibri" pitchFamily="34" charset="-120"/>
+              </a:rPr>
+              <a:t>hosted, OAuth as you</a:t>
+            </a:r>
+            <a:endParaRPr lang="en-US" sz="950" dirty="0"/>
+          </a:p>
+        </p:txBody>
+      </p:sp>
+      <p:sp>
+        <p:nvSpPr>
+          <p:cNvPr id="23" name="Text 20"/>
+          <p:cNvSpPr txBox="1"/>
+          <p:nvPr/>
+        </p:nvSpPr>
+        <p:spPr>
+          <a:xfrm>
+            <a:off x="4041648" y="3877056"/>
+            <a:ext cx="2734056" cy="219456"/>
+          </a:xfrm>
+          <a:prstGeom prst="rect">
+            <a:avLst/>
+          </a:prstGeom>
+          <a:noFill/>
+          <a:ln/>
+        </p:spPr>
+        <p:txBody>
+          <a:bodyPr wrap="square" lIns="0" tIns="0" rIns="0" bIns="0" rtlCol="0" anchor="ctr"/>
+          <a:lstStyle/>
+          <a:p>
+            <a:pPr indent="0" marL="0">
+              <a:buNone/>
+            </a:pPr>
+            <a:r>
+              <a:rPr lang="en-US" sz="950" dirty="0">
+                <a:solidFill>
+                  <a:srgbClr val="192954"/>
+                </a:solidFill>
+                <a:latin typeface="Consolas" pitchFamily="34" charset="0"/>
+                <a:ea typeface="Consolas" pitchFamily="34" charset="-122"/>
+                <a:cs typeface="Consolas" pitchFamily="34" charset="-120"/>
+              </a:rPr>
+              <a:t>api.githubcopilot.com/mcp/</a:t>
+            </a:r>
+            <a:endParaRPr lang="en-US" sz="950" dirty="0"/>
+          </a:p>
+        </p:txBody>
+      </p:sp>
+      <p:sp>
+        <p:nvSpPr>
+          <p:cNvPr id="24" name="Shape 21"/>
+          <p:cNvSpPr/>
+          <p:nvPr/>
+        </p:nvSpPr>
+        <p:spPr>
+          <a:xfrm>
+            <a:off x="640080" y="4261104"/>
+            <a:ext cx="6355080" cy="438912"/>
+          </a:xfrm>
+          <a:prstGeom prst="roundRect">
+            <a:avLst>
+              <a:gd name="adj" fmla="val 12500"/>
+            </a:avLst>
+          </a:prstGeom>
+          <a:solidFill>
+            <a:srgbClr val="FFFFFF"/>
+          </a:solidFill>
+          <a:ln w="12700">
+            <a:solidFill>
+              <a:srgbClr val="CFC7B8"/>
+            </a:solidFill>
+            <a:prstDash val="solid"/>
+          </a:ln>
+        </p:spPr>
+      </p:sp>
+      <p:sp>
+        <p:nvSpPr>
+          <p:cNvPr id="25" name="Text 22"/>
+          <p:cNvSpPr txBox="1"/>
+          <p:nvPr/>
+        </p:nvSpPr>
+        <p:spPr>
+          <a:xfrm>
+            <a:off x="859536" y="4379976"/>
+            <a:ext cx="1463040" cy="237744"/>
+          </a:xfrm>
+          <a:prstGeom prst="rect">
+            <a:avLst/>
+          </a:prstGeom>
+          <a:noFill/>
+          <a:ln/>
+        </p:spPr>
+        <p:txBody>
+          <a:bodyPr wrap="square" lIns="0" tIns="0" rIns="0" bIns="0" rtlCol="0" anchor="ctr"/>
+          <a:lstStyle/>
+          <a:p>
+            <a:pPr indent="0" marL="0">
+              <a:buNone/>
+            </a:pPr>
+            <a:r>
+              <a:rPr lang="en-US" sz="1100" b="1" dirty="0">
+                <a:solidFill>
+                  <a:srgbClr val="051D60"/>
+                </a:solidFill>
+                <a:latin typeface="Calibri" pitchFamily="34" charset="0"/>
+                <a:ea typeface="Calibri" pitchFamily="34" charset="-122"/>
+                <a:cs typeface="Calibri" pitchFamily="34" charset="-120"/>
+              </a:rPr>
+              <a:t>GitHub</a:t>
+            </a:r>
+            <a:endParaRPr lang="en-US" sz="1100" dirty="0"/>
+          </a:p>
+        </p:txBody>
+      </p:sp>
+      <p:sp>
+        <p:nvSpPr>
+          <p:cNvPr id="26" name="Text 23"/>
+          <p:cNvSpPr txBox="1"/>
+          <p:nvPr/>
+        </p:nvSpPr>
+        <p:spPr>
+          <a:xfrm>
+            <a:off x="2377440" y="4389120"/>
+            <a:ext cx="1600200" cy="219456"/>
+          </a:xfrm>
+          <a:prstGeom prst="rect">
+            <a:avLst/>
+          </a:prstGeom>
+          <a:noFill/>
+          <a:ln/>
+        </p:spPr>
+        <p:txBody>
+          <a:bodyPr wrap="square" lIns="0" tIns="0" rIns="0" bIns="0" rtlCol="0" anchor="ctr"/>
+          <a:lstStyle/>
+          <a:p>
+            <a:pPr indent="0" marL="0">
+              <a:buNone/>
+            </a:pPr>
+            <a:r>
+              <a:rPr lang="en-US" sz="950" dirty="0">
+                <a:solidFill>
+                  <a:srgbClr val="5F6476"/>
+                </a:solidFill>
+                <a:latin typeface="Calibri" pitchFamily="34" charset="0"/>
+                <a:ea typeface="Calibri" pitchFamily="34" charset="-122"/>
+                <a:cs typeface="Calibri" pitchFamily="34" charset="-120"/>
+              </a:rPr>
+              <a:t>local, a token</a:t>
+            </a:r>
+            <a:endParaRPr lang="en-US" sz="950" dirty="0"/>
+          </a:p>
+        </p:txBody>
+      </p:sp>
+      <p:sp>
+        <p:nvSpPr>
+          <p:cNvPr id="27" name="Text 24"/>
+          <p:cNvSpPr txBox="1"/>
+          <p:nvPr/>
+        </p:nvSpPr>
+        <p:spPr>
+          <a:xfrm>
+            <a:off x="4041648" y="4389120"/>
+            <a:ext cx="2734056" cy="219456"/>
+          </a:xfrm>
+          <a:prstGeom prst="rect">
+            <a:avLst/>
+          </a:prstGeom>
+          <a:noFill/>
+          <a:ln/>
+        </p:spPr>
+        <p:txBody>
+          <a:bodyPr wrap="square" lIns="0" tIns="0" rIns="0" bIns="0" rtlCol="0" anchor="ctr"/>
+          <a:lstStyle/>
+          <a:p>
+            <a:pPr indent="0" marL="0">
+              <a:buNone/>
+            </a:pPr>
+            <a:r>
+              <a:rPr lang="en-US" sz="950" dirty="0">
+                <a:solidFill>
+                  <a:srgbClr val="192954"/>
+                </a:solidFill>
+                <a:latin typeface="Consolas" pitchFamily="34" charset="0"/>
+                <a:ea typeface="Consolas" pitchFamily="34" charset="-122"/>
+                <a:cs typeface="Consolas" pitchFamily="34" charset="-120"/>
+              </a:rPr>
+              <a:t>ghcr.io/github/github-mcp-server</a:t>
+            </a:r>
+            <a:endParaRPr lang="en-US" sz="950" dirty="0"/>
+          </a:p>
+        </p:txBody>
+      </p:sp>
+      <p:sp>
+        <p:nvSpPr>
+          <p:cNvPr id="28" name="Shape 25"/>
+          <p:cNvSpPr/>
+          <p:nvPr/>
+        </p:nvSpPr>
+        <p:spPr>
+          <a:xfrm>
+            <a:off x="640080" y="4846320"/>
+            <a:ext cx="6355080" cy="914400"/>
+          </a:xfrm>
+          <a:prstGeom prst="roundRect">
+            <a:avLst>
+              <a:gd name="adj" fmla="val 6000"/>
+            </a:avLst>
+          </a:prstGeom>
+          <a:solidFill>
+            <a:srgbClr val="051D60"/>
+          </a:solidFill>
+          <a:ln w="12700">
+            <a:solidFill>
+              <a:srgbClr val="051D60"/>
+            </a:solidFill>
+            <a:prstDash val="solid"/>
+          </a:ln>
+        </p:spPr>
+      </p:sp>
+      <p:sp>
+        <p:nvSpPr>
+          <p:cNvPr id="29" name="Text 26"/>
+          <p:cNvSpPr txBox="1"/>
+          <p:nvPr/>
+        </p:nvSpPr>
+        <p:spPr>
+          <a:xfrm>
+            <a:off x="877824" y="4974336"/>
+            <a:ext cx="5897880" cy="237744"/>
+          </a:xfrm>
+          <a:prstGeom prst="rect">
+            <a:avLst/>
+          </a:prstGeom>
+          <a:noFill/>
+          <a:ln/>
+        </p:spPr>
+        <p:txBody>
+          <a:bodyPr wrap="square" lIns="0" tIns="0" rIns="0" bIns="0" rtlCol="0" anchor="ctr"/>
+          <a:lstStyle/>
+          <a:p>
+            <a:pPr indent="0" marL="0">
+              <a:buNone/>
+            </a:pPr>
+            <a:r>
+              <a:rPr lang="en-US" sz="1150" b="1" dirty="0">
+                <a:solidFill>
+                  <a:srgbClr val="FAF3E7"/>
+                </a:solidFill>
+                <a:latin typeface="Calibri" pitchFamily="34" charset="0"/>
+                <a:ea typeface="Calibri" pitchFamily="34" charset="-122"/>
+                <a:cs typeface="Calibri" pitchFamily="34" charset="-120"/>
+              </a:rPr>
+              <a:t>No credential is in any of those files</a:t>
+            </a:r>
+            <a:endParaRPr lang="en-US" sz="1150" dirty="0"/>
+          </a:p>
+        </p:txBody>
+      </p:sp>
+      <p:sp>
+        <p:nvSpPr>
+          <p:cNvPr id="30" name="Text 27"/>
+          <p:cNvSpPr txBox="1"/>
+          <p:nvPr/>
+        </p:nvSpPr>
+        <p:spPr>
+          <a:xfrm>
+            <a:off x="877824" y="5230368"/>
+            <a:ext cx="5897880" cy="457200"/>
+          </a:xfrm>
+          <a:prstGeom prst="rect">
+            <a:avLst/>
+          </a:prstGeom>
+          <a:noFill/>
+          <a:ln/>
+        </p:spPr>
+        <p:txBody>
+          <a:bodyPr wrap="square" lIns="0" tIns="0" rIns="0" bIns="0" rtlCol="0" anchor="ctr"/>
+          <a:lstStyle/>
+          <a:p>
+            <a:pPr indent="0" marL="0">
+              <a:lnSpc>
+                <a:spcPct val="110000"/>
+              </a:lnSpc>
+              <a:buNone/>
+            </a:pPr>
+            <a:r>
+              <a:rPr lang="en-US" sz="900" dirty="0">
+                <a:solidFill>
+                  <a:srgbClr val="E4DED3"/>
+                </a:solidFill>
+                <a:latin typeface="Calibri" pitchFamily="34" charset="0"/>
+                <a:ea typeface="Calibri" pitchFamily="34" charset="-122"/>
+                <a:cs typeface="Calibri" pitchFamily="34" charset="-120"/>
+              </a:rPr>
+              <a:t>Every secret is a ${NAME} the harness expands. A CI check fails on a value shaped like a known token anywhere in the document, and on any literal under a credential-shaped key — which is what catches an internal credential matching no public pattern.</a:t>
+            </a:r>
+            <a:endParaRPr lang="en-US" sz="900" dirty="0"/>
+          </a:p>
+        </p:txBody>
+      </p:sp>
+      <p:sp>
+        <p:nvSpPr>
+          <p:cNvPr id="31" name="Text 28"/>
+          <p:cNvSpPr txBox="1"/>
+          <p:nvPr/>
+        </p:nvSpPr>
+        <p:spPr>
+          <a:xfrm>
+            <a:off x="7406640" y="1847088"/>
+            <a:ext cx="4144975" cy="256032"/>
+          </a:xfrm>
+          <a:prstGeom prst="rect">
+            <a:avLst/>
+          </a:prstGeom>
+          <a:noFill/>
+          <a:ln/>
+        </p:spPr>
+        <p:txBody>
+          <a:bodyPr wrap="square" lIns="0" tIns="0" rIns="0" bIns="0" rtlCol="0" anchor="ctr"/>
+          <a:lstStyle/>
+          <a:p>
+            <a:pPr indent="0" marL="0">
+              <a:buNone/>
+            </a:pPr>
+            <a:r>
+              <a:rPr lang="en-US" sz="1300" b="1" dirty="0">
+                <a:solidFill>
+                  <a:srgbClr val="051D60"/>
+                </a:solidFill>
+                <a:latin typeface="Mulish" pitchFamily="34" charset="0"/>
+                <a:ea typeface="Mulish" pitchFamily="34" charset="-122"/>
+                <a:cs typeface="Mulish" pitchFamily="34" charset="-120"/>
+              </a:rPr>
+              <a:t>automation/cron/ — optional</a:t>
+            </a:r>
+            <a:endParaRPr lang="en-US" sz="1300" dirty="0"/>
+          </a:p>
+        </p:txBody>
+      </p:sp>
+      <p:sp>
+        <p:nvSpPr>
+          <p:cNvPr id="32" name="Shape 29"/>
+          <p:cNvSpPr/>
+          <p:nvPr/>
+        </p:nvSpPr>
+        <p:spPr>
+          <a:xfrm>
+            <a:off x="7406640" y="2212848"/>
+            <a:ext cx="4144975" cy="1572768"/>
+          </a:xfrm>
+          <a:prstGeom prst="roundRect">
+            <a:avLst>
+              <a:gd name="adj" fmla="val 3488"/>
+            </a:avLst>
+          </a:prstGeom>
+          <a:solidFill>
+            <a:srgbClr val="F1E9DA"/>
+          </a:solidFill>
+          <a:ln w="12700">
+            <a:solidFill>
+              <a:srgbClr val="CFC7B8"/>
+            </a:solidFill>
+            <a:prstDash val="solid"/>
+          </a:ln>
+        </p:spPr>
+      </p:sp>
+      <p:sp>
+        <p:nvSpPr>
+          <p:cNvPr id="33" name="Text 30"/>
+          <p:cNvSpPr txBox="1"/>
+          <p:nvPr/>
+        </p:nvSpPr>
+        <p:spPr>
+          <a:xfrm>
+            <a:off x="7644384" y="2340864"/>
+            <a:ext cx="3687775" cy="237744"/>
+          </a:xfrm>
+          <a:prstGeom prst="rect">
+            <a:avLst/>
+          </a:prstGeom>
+          <a:noFill/>
+          <a:ln/>
+        </p:spPr>
+        <p:txBody>
+          <a:bodyPr wrap="square" lIns="0" tIns="0" rIns="0" bIns="0" rtlCol="0" anchor="ctr"/>
+          <a:lstStyle/>
+          <a:p>
+            <a:pPr indent="0" marL="0">
+              <a:buNone/>
+            </a:pPr>
+            <a:r>
+              <a:rPr lang="en-US" sz="1150" b="1" dirty="0">
+                <a:solidFill>
+                  <a:srgbClr val="051D60"/>
+                </a:solidFill>
+                <a:latin typeface="Calibri" pitchFamily="34" charset="0"/>
+                <a:ea typeface="Calibri" pitchFamily="34" charset="-122"/>
+                <a:cs typeface="Calibri" pitchFamily="34" charset="-120"/>
+              </a:rPr>
+              <a:t>Tracker item → proposed branch</a:t>
+            </a:r>
+            <a:endParaRPr lang="en-US" sz="1150" dirty="0"/>
+          </a:p>
+        </p:txBody>
+      </p:sp>
+      <p:sp>
+        <p:nvSpPr>
+          <p:cNvPr id="34" name="Text 31"/>
+          <p:cNvSpPr txBox="1"/>
+          <p:nvPr/>
+        </p:nvSpPr>
+        <p:spPr>
+          <a:xfrm>
+            <a:off x="7644384" y="2615184"/>
+            <a:ext cx="3687775" cy="1042416"/>
+          </a:xfrm>
+          <a:prstGeom prst="rect">
+            <a:avLst/>
+          </a:prstGeom>
+          <a:noFill/>
+          <a:ln/>
+        </p:spPr>
+        <p:txBody>
+          <a:bodyPr wrap="square" lIns="0" tIns="0" rIns="0" bIns="0" rtlCol="0" anchor="ctr"/>
+          <a:lstStyle/>
+          <a:p>
+            <a:pPr indent="0" marL="0">
+              <a:lnSpc>
+                <a:spcPct val="114000"/>
+              </a:lnSpc>
+              <a:buNone/>
+            </a:pPr>
+            <a:r>
+              <a:rPr lang="en-US" sz="950" dirty="0">
+                <a:solidFill>
+                  <a:srgbClr val="5F6476"/>
+                </a:solidFill>
+                <a:latin typeface="Calibri" pitchFamily="34" charset="0"/>
+                <a:ea typeface="Calibri" pitchFamily="34" charset="-122"/>
+                <a:cs typeface="Calibri" pitchFamily="34" charset="-120"/>
+              </a:rPr>
+              <a:t>For each tagged item it has not seen: branch off the base, propose, seed the proposal from the item, commit, push, open a pull request. What it opens is a scaffolded branch — a person still writes the why.</a:t>
+            </a:r>
+            <a:endParaRPr lang="en-US" sz="950" dirty="0"/>
+          </a:p>
+        </p:txBody>
+      </p:sp>
+      <p:sp>
+        <p:nvSpPr>
+          <p:cNvPr id="35" name="Shape 32"/>
+          <p:cNvSpPr/>
+          <p:nvPr/>
+        </p:nvSpPr>
+        <p:spPr>
+          <a:xfrm>
+            <a:off x="7406640" y="3931920"/>
+            <a:ext cx="4144975" cy="548640"/>
+          </a:xfrm>
+          <a:prstGeom prst="roundRect">
+            <a:avLst>
+              <a:gd name="adj" fmla="val 10000"/>
+            </a:avLst>
+          </a:prstGeom>
+          <a:solidFill>
+            <a:srgbClr val="FFFFFF"/>
+          </a:solidFill>
+          <a:ln w="12700">
+            <a:solidFill>
+              <a:srgbClr val="CFC7B8"/>
+            </a:solidFill>
+            <a:prstDash val="solid"/>
+          </a:ln>
+        </p:spPr>
+      </p:sp>
+      <p:sp>
+        <p:nvSpPr>
+          <p:cNvPr id="36" name="Text 33"/>
+          <p:cNvSpPr txBox="1"/>
+          <p:nvPr/>
+        </p:nvSpPr>
+        <p:spPr>
+          <a:xfrm>
+            <a:off x="7626096" y="4014216"/>
+            <a:ext cx="3706063" cy="219456"/>
+          </a:xfrm>
+          <a:prstGeom prst="rect">
+            <a:avLst/>
+          </a:prstGeom>
+          <a:noFill/>
+          <a:ln/>
+        </p:spPr>
+        <p:txBody>
+          <a:bodyPr wrap="square" lIns="0" tIns="0" rIns="0" bIns="0" rtlCol="0" anchor="ctr"/>
+          <a:lstStyle/>
+          <a:p>
+            <a:pPr indent="0" marL="0">
+              <a:buNone/>
+            </a:pPr>
+            <a:r>
+              <a:rPr lang="en-US" sz="1050" b="1" dirty="0">
+                <a:solidFill>
+                  <a:srgbClr val="051D60"/>
+                </a:solidFill>
+                <a:latin typeface="Calibri" pitchFamily="34" charset="0"/>
+                <a:ea typeface="Calibri" pitchFamily="34" charset="-122"/>
+                <a:cs typeface="Calibri" pitchFamily="34" charset="-120"/>
+              </a:rPr>
+              <a:t>Never touches your checkout</a:t>
+            </a:r>
+            <a:endParaRPr lang="en-US" sz="1050" dirty="0"/>
+          </a:p>
+        </p:txBody>
+      </p:sp>
+      <p:sp>
+        <p:nvSpPr>
+          <p:cNvPr id="37" name="Text 34"/>
+          <p:cNvSpPr txBox="1"/>
+          <p:nvPr/>
+        </p:nvSpPr>
+        <p:spPr>
+          <a:xfrm>
+            <a:off x="7626096" y="4233672"/>
+            <a:ext cx="3706063" cy="201168"/>
+          </a:xfrm>
+          <a:prstGeom prst="rect">
+            <a:avLst/>
+          </a:prstGeom>
+          <a:noFill/>
+          <a:ln/>
+        </p:spPr>
+        <p:txBody>
+          <a:bodyPr wrap="square" lIns="0" tIns="0" rIns="0" bIns="0" rtlCol="0" anchor="ctr"/>
+          <a:lstStyle/>
+          <a:p>
+            <a:pPr indent="0" marL="0">
+              <a:buNone/>
+            </a:pPr>
+            <a:r>
+              <a:rPr lang="en-US" sz="900" dirty="0">
+                <a:solidFill>
+                  <a:srgbClr val="5F6476"/>
+                </a:solidFill>
+                <a:latin typeface="Calibri" pitchFamily="34" charset="0"/>
+                <a:ea typeface="Calibri" pitchFamily="34" charset="-122"/>
+                <a:cs typeface="Calibri" pitchFamily="34" charset="-120"/>
+              </a:rPr>
+              <a:t>every change happens in a worktree it creates and removes</a:t>
+            </a:r>
+            <a:endParaRPr lang="en-US" sz="900" dirty="0"/>
+          </a:p>
+        </p:txBody>
+      </p:sp>
+      <p:sp>
+        <p:nvSpPr>
+          <p:cNvPr id="38" name="Shape 35"/>
+          <p:cNvSpPr/>
+          <p:nvPr/>
+        </p:nvSpPr>
+        <p:spPr>
+          <a:xfrm>
+            <a:off x="7406640" y="4553712"/>
+            <a:ext cx="4144975" cy="548640"/>
+          </a:xfrm>
+          <a:prstGeom prst="roundRect">
+            <a:avLst>
+              <a:gd name="adj" fmla="val 10000"/>
+            </a:avLst>
+          </a:prstGeom>
+          <a:solidFill>
+            <a:srgbClr val="FFFFFF"/>
+          </a:solidFill>
+          <a:ln w="12700">
+            <a:solidFill>
+              <a:srgbClr val="CFC7B8"/>
+            </a:solidFill>
+            <a:prstDash val="solid"/>
+          </a:ln>
+        </p:spPr>
+      </p:sp>
+      <p:sp>
+        <p:nvSpPr>
+          <p:cNvPr id="39" name="Text 36"/>
+          <p:cNvSpPr txBox="1"/>
+          <p:nvPr/>
+        </p:nvSpPr>
+        <p:spPr>
+          <a:xfrm>
+            <a:off x="7626096" y="4636008"/>
+            <a:ext cx="3706063" cy="219456"/>
+          </a:xfrm>
+          <a:prstGeom prst="rect">
+            <a:avLst/>
+          </a:prstGeom>
+          <a:noFill/>
+          <a:ln/>
+        </p:spPr>
+        <p:txBody>
+          <a:bodyPr wrap="square" lIns="0" tIns="0" rIns="0" bIns="0" rtlCol="0" anchor="ctr"/>
+          <a:lstStyle/>
+          <a:p>
+            <a:pPr indent="0" marL="0">
+              <a:buNone/>
+            </a:pPr>
+            <a:r>
+              <a:rPr lang="en-US" sz="1050" b="1" dirty="0">
+                <a:solidFill>
+                  <a:srgbClr val="051D60"/>
+                </a:solidFill>
+                <a:latin typeface="Calibri" pitchFamily="34" charset="0"/>
+                <a:ea typeface="Calibri" pitchFamily="34" charset="-122"/>
+                <a:cs typeface="Calibri" pitchFamily="34" charset="-120"/>
+              </a:rPr>
+              <a:t>Nothing irreversible without --push</a:t>
+            </a:r>
+            <a:endParaRPr lang="en-US" sz="1050" dirty="0"/>
+          </a:p>
+        </p:txBody>
+      </p:sp>
+      <p:sp>
+        <p:nvSpPr>
+          <p:cNvPr id="40" name="Text 37"/>
+          <p:cNvSpPr txBox="1"/>
+          <p:nvPr/>
+        </p:nvSpPr>
+        <p:spPr>
+          <a:xfrm>
+            <a:off x="7626096" y="4855464"/>
+            <a:ext cx="3706063" cy="201168"/>
+          </a:xfrm>
+          <a:prstGeom prst="rect">
+            <a:avLst/>
+          </a:prstGeom>
+          <a:noFill/>
+          <a:ln/>
+        </p:spPr>
+        <p:txBody>
+          <a:bodyPr wrap="square" lIns="0" tIns="0" rIns="0" bIns="0" rtlCol="0" anchor="ctr"/>
+          <a:lstStyle/>
+          <a:p>
+            <a:pPr indent="0" marL="0">
+              <a:buNone/>
+            </a:pPr>
+            <a:r>
+              <a:rPr lang="en-US" sz="900" dirty="0">
+                <a:solidFill>
+                  <a:srgbClr val="5F6476"/>
+                </a:solidFill>
+                <a:latin typeface="Calibri" pitchFamily="34" charset="0"/>
+                <a:ea typeface="Calibri" pitchFamily="34" charset="-122"/>
+                <a:cs typeface="Calibri" pitchFamily="34" charset="-120"/>
+              </a:rPr>
+              <a:t>the default stops at the local commit and reports</a:t>
+            </a:r>
+            <a:endParaRPr lang="en-US" sz="900" dirty="0"/>
+          </a:p>
+        </p:txBody>
+      </p:sp>
+      <p:sp>
+        <p:nvSpPr>
+          <p:cNvPr id="41" name="Shape 38"/>
+          <p:cNvSpPr/>
+          <p:nvPr/>
+        </p:nvSpPr>
+        <p:spPr>
+          <a:xfrm>
+            <a:off x="7406640" y="5175504"/>
+            <a:ext cx="4144975" cy="548640"/>
+          </a:xfrm>
+          <a:prstGeom prst="roundRect">
+            <a:avLst>
+              <a:gd name="adj" fmla="val 10000"/>
+            </a:avLst>
+          </a:prstGeom>
+          <a:solidFill>
+            <a:srgbClr val="FFFFFF"/>
+          </a:solidFill>
+          <a:ln w="12700">
+            <a:solidFill>
+              <a:srgbClr val="CFC7B8"/>
+            </a:solidFill>
+            <a:prstDash val="solid"/>
+          </a:ln>
+        </p:spPr>
+      </p:sp>
+      <p:sp>
+        <p:nvSpPr>
+          <p:cNvPr id="42" name="Text 39"/>
+          <p:cNvSpPr txBox="1"/>
+          <p:nvPr/>
+        </p:nvSpPr>
+        <p:spPr>
+          <a:xfrm>
+            <a:off x="7626096" y="5257800"/>
+            <a:ext cx="3706063" cy="219456"/>
+          </a:xfrm>
+          <a:prstGeom prst="rect">
+            <a:avLst/>
+          </a:prstGeom>
+          <a:noFill/>
+          <a:ln/>
+        </p:spPr>
+        <p:txBody>
+          <a:bodyPr wrap="square" lIns="0" tIns="0" rIns="0" bIns="0" rtlCol="0" anchor="ctr"/>
+          <a:lstStyle/>
+          <a:p>
+            <a:pPr indent="0" marL="0">
+              <a:buNone/>
+            </a:pPr>
+            <a:r>
+              <a:rPr lang="en-US" sz="1050" b="1" dirty="0">
+                <a:solidFill>
+                  <a:srgbClr val="051D60"/>
+                </a:solidFill>
+                <a:latin typeface="Calibri" pitchFamily="34" charset="0"/>
+                <a:ea typeface="Calibri" pitchFamily="34" charset="-122"/>
+                <a:cs typeface="Calibri" pitchFamily="34" charset="-120"/>
+              </a:rPr>
+              <a:t>Tracker text is never code</a:t>
+            </a:r>
+            <a:endParaRPr lang="en-US" sz="1050" dirty="0"/>
+          </a:p>
+        </p:txBody>
+      </p:sp>
+      <p:sp>
+        <p:nvSpPr>
+          <p:cNvPr id="43" name="Text 40"/>
+          <p:cNvSpPr txBox="1"/>
+          <p:nvPr/>
+        </p:nvSpPr>
+        <p:spPr>
+          <a:xfrm>
+            <a:off x="7626096" y="5477256"/>
+            <a:ext cx="3706063" cy="201168"/>
+          </a:xfrm>
+          <a:prstGeom prst="rect">
+            <a:avLst/>
+          </a:prstGeom>
+          <a:noFill/>
+          <a:ln/>
+        </p:spPr>
+        <p:txBody>
+          <a:bodyPr wrap="square" lIns="0" tIns="0" rIns="0" bIns="0" rtlCol="0" anchor="ctr"/>
+          <a:lstStyle/>
+          <a:p>
+            <a:pPr indent="0" marL="0">
+              <a:buNone/>
+            </a:pPr>
+            <a:r>
+              <a:rPr lang="en-US" sz="900" dirty="0">
+                <a:solidFill>
+                  <a:srgbClr val="5F6476"/>
+                </a:solidFill>
+                <a:latin typeface="Calibri" pitchFamily="34" charset="0"/>
+                <a:ea typeface="Calibri" pitchFamily="34" charset="-122"/>
+                <a:cs typeface="Calibri" pitchFamily="34" charset="-120"/>
+              </a:rPr>
+              <a:t>anyone can file a ticket; values arrive via the environment</a:t>
+            </a:r>
+            <a:endParaRPr lang="en-US" sz="900" dirty="0"/>
+          </a:p>
+        </p:txBody>
+      </p:sp>
+      <p:sp>
+        <p:nvSpPr>
+          <p:cNvPr id="44" name="Shape 41"/>
+          <p:cNvSpPr/>
+          <p:nvPr/>
+        </p:nvSpPr>
+        <p:spPr>
+          <a:xfrm>
+            <a:off x="640080" y="5897880"/>
+            <a:ext cx="6355080" cy="411480"/>
+          </a:xfrm>
+          <a:prstGeom prst="roundRect">
+            <a:avLst>
+              <a:gd name="adj" fmla="val 13333"/>
+            </a:avLst>
+          </a:prstGeom>
+          <a:solidFill>
+            <a:srgbClr val="F1E9DA"/>
+          </a:solidFill>
+          <a:ln w="12700">
+            <a:solidFill>
+              <a:srgbClr val="CFC7B8"/>
+            </a:solidFill>
+            <a:prstDash val="solid"/>
+          </a:ln>
+        </p:spPr>
+      </p:sp>
+      <p:sp>
+        <p:nvSpPr>
+          <p:cNvPr id="45" name="Text 42"/>
+          <p:cNvSpPr txBox="1"/>
+          <p:nvPr/>
+        </p:nvSpPr>
+        <p:spPr>
+          <a:xfrm>
+            <a:off x="859536" y="6007608"/>
+            <a:ext cx="5916168" cy="219456"/>
+          </a:xfrm>
+          <a:prstGeom prst="rect">
+            <a:avLst/>
+          </a:prstGeom>
+          <a:noFill/>
+          <a:ln/>
+        </p:spPr>
+        <p:txBody>
+          <a:bodyPr wrap="square" lIns="0" tIns="0" rIns="0" bIns="0" rtlCol="0" anchor="ctr"/>
+          <a:lstStyle/>
+          <a:p>
+            <a:pPr indent="0" marL="0">
+              <a:buNone/>
+            </a:pPr>
+            <a:r>
+              <a:rPr lang="en-US" sz="900" dirty="0">
+                <a:solidFill>
+                  <a:srgbClr val="5F6476"/>
+                </a:solidFill>
+                <a:latin typeface="Calibri" pitchFamily="34" charset="0"/>
+                <a:ea typeface="Calibri" pitchFamily="34" charset="-122"/>
+                <a:cs typeface="Calibri" pitchFamily="34" charset="-120"/>
+              </a:rPr>
+              <a:t>Prefer a hosted route: it carries no secret to leak, and acts as you — so it can do nothing your own account cannot.</a:t>
+            </a:r>
+            <a:endParaRPr lang="en-US" sz="900" dirty="0"/>
+          </a:p>
+        </p:txBody>
+      </p:sp>
+    </p:spTree>
+  </p:cSld>
+  <p:clrMapOvr>
+    <a:masterClrMapping/>
+  </p:clrMapOvr>
+</p:sld>
+</file>
+
+<file path=ppt/slides/slide18.xml><?xml version="1.0" encoding="utf-8"?>
+<p:sld xmlns:a="http://schemas.openxmlformats.org/drawingml/2006/main" xmlns:r="http://schemas.openxmlformats.org/officeDocument/2006/relationships" xmlns:p="http://schemas.openxmlformats.org/presentationml/2006/main">
+  <p:cSld name="Slide 18">
+    <p:bg>
+      <p:bgPr>
+        <a:solidFill>
+          <a:srgbClr val="051D60"/>
+        </a:solidFill>
+      </p:bgPr>
+    </p:bg>
+    <p:spTree>
+      <p:nvGrpSpPr>
+        <p:cNvPr id="1" name=""/>
+        <p:cNvGrpSpPr/>
+        <p:nvPr/>
+      </p:nvGrpSpPr>
+      <p:grpSpPr>
+        <a:xfrm>
+          <a:off x="0" y="0"/>
+          <a:ext cx="0" cy="0"/>
+          <a:chOff x="0" y="0"/>
+          <a:chExt cx="0" cy="0"/>
+        </a:xfrm>
+      </p:grpSpPr>
+      <p:sp>
+        <p:nvSpPr>
+          <p:cNvPr id="2" name="Text 0"/>
+          <p:cNvSpPr txBox="1"/>
+          <p:nvPr/>
+        </p:nvSpPr>
+        <p:spPr>
+          <a:xfrm>
+            <a:off x="640080" y="402336"/>
+            <a:ext cx="10911535" cy="219456"/>
+          </a:xfrm>
+          <a:prstGeom prst="rect">
+            <a:avLst/>
+          </a:prstGeom>
+          <a:noFill/>
+          <a:ln/>
+        </p:spPr>
+        <p:txBody>
+          <a:bodyPr wrap="square" lIns="0" tIns="0" rIns="0" bIns="0" rtlCol="0" anchor="ctr"/>
+          <a:lstStyle/>
+          <a:p>
+            <a:pPr indent="0" marL="0">
+              <a:buNone/>
+            </a:pPr>
+            <a:r>
+              <a:rPr lang="en-US" sz="1000" b="1" spc="200" kern="0" dirty="0">
+                <a:solidFill>
+                  <a:srgbClr val="9BA2BA"/>
+                </a:solidFill>
+                <a:latin typeface="Calibri" pitchFamily="34" charset="0"/>
+                <a:ea typeface="Calibri" pitchFamily="34" charset="-122"/>
+                <a:cs typeface="Calibri" pitchFamily="34" charset="-120"/>
+              </a:rPr>
+              <a:t>TELEMETRY</a:t>
+            </a:r>
+            <a:endParaRPr lang="en-US" sz="1000" dirty="0"/>
+          </a:p>
+        </p:txBody>
+      </p:sp>
+      <p:sp>
+        <p:nvSpPr>
+          <p:cNvPr id="3" name="Text 1"/>
+          <p:cNvSpPr txBox="1"/>
+          <p:nvPr/>
+        </p:nvSpPr>
+        <p:spPr>
+          <a:xfrm>
+            <a:off x="640080" y="676656"/>
+            <a:ext cx="10911535" cy="566928"/>
+          </a:xfrm>
+          <a:prstGeom prst="rect">
+            <a:avLst/>
+          </a:prstGeom>
+          <a:noFill/>
+          <a:ln/>
+        </p:spPr>
+        <p:txBody>
+          <a:bodyPr wrap="square" lIns="0" tIns="0" rIns="0" bIns="0" rtlCol="0" anchor="t"/>
+          <a:lstStyle/>
+          <a:p>
+            <a:pPr indent="0" marL="0">
+              <a:buNone/>
+            </a:pPr>
+            <a:r>
+              <a:rPr lang="en-US" sz="3100" b="1" dirty="0">
+                <a:solidFill>
+                  <a:srgbClr val="FAF3E7"/>
+                </a:solidFill>
+                <a:latin typeface="Mulish" pitchFamily="34" charset="0"/>
+                <a:ea typeface="Mulish" pitchFamily="34" charset="-122"/>
+                <a:cs typeface="Mulish" pitchFamily="34" charset="-120"/>
+              </a:rPr>
+              <a:t>One trace per change, one span per gate</a:t>
+            </a:r>
+            <a:endParaRPr lang="en-US" sz="3100" dirty="0"/>
+          </a:p>
+        </p:txBody>
+      </p:sp>
+      <p:sp>
+        <p:nvSpPr>
+          <p:cNvPr id="4" name="Text 2"/>
+          <p:cNvSpPr txBox="1"/>
+          <p:nvPr/>
+        </p:nvSpPr>
+        <p:spPr>
+          <a:xfrm>
+            <a:off x="640080" y="1280160"/>
+            <a:ext cx="10424160" cy="329184"/>
+          </a:xfrm>
+          <a:prstGeom prst="rect">
+            <a:avLst/>
+          </a:prstGeom>
+          <a:noFill/>
+          <a:ln/>
+        </p:spPr>
+        <p:txBody>
+          <a:bodyPr wrap="square" lIns="0" tIns="0" rIns="0" bIns="0" rtlCol="0" anchor="t"/>
+          <a:lstStyle/>
+          <a:p>
+            <a:pPr indent="0" marL="0">
+              <a:buNone/>
+            </a:pPr>
+            <a:r>
+              <a:rPr lang="en-US" sz="1350" dirty="0">
+                <a:solidFill>
+                  <a:srgbClr val="9BA2BA"/>
+                </a:solidFill>
+                <a:latin typeface="Calibri" pitchFamily="34" charset="0"/>
+                <a:ea typeface="Calibri" pitchFamily="34" charset="-122"/>
+                <a:cs typeface="Calibri" pitchFamily="34" charset="-120"/>
+              </a:rPr>
+              <a:t>navi-delivery telemetry — off until you run it. No other command makes a network call.</a:t>
+            </a:r>
+            <a:endParaRPr lang="en-US" sz="1350" dirty="0"/>
+          </a:p>
+        </p:txBody>
+      </p:sp>
+      <p:pic>
+        <p:nvPicPr>
+          <p:cNvPr id="5" name="Image 0" descr="preencoded.png">    </p:cNvPr>
+          <p:cNvPicPr>
+            <a:picLocks noChangeAspect="1"/>
+          </p:cNvPicPr>
+          <p:nvPr/>
+        </p:nvPicPr>
+        <p:blipFill>
+          <a:blip r:embed="rId1"/>
+          <a:stretch>
+            <a:fillRect/>
+          </a:stretch>
+        </p:blipFill>
+        <p:spPr>
+          <a:xfrm>
+            <a:off x="10637215" y="6382512"/>
+            <a:ext cx="914400" cy="126124"/>
+          </a:xfrm>
+          <a:prstGeom prst="rect">
+            <a:avLst/>
+          </a:prstGeom>
+        </p:spPr>
+      </p:pic>
+      <p:sp>
+        <p:nvSpPr>
+          <p:cNvPr id="6" name="Text 3"/>
+          <p:cNvSpPr txBox="1"/>
+          <p:nvPr/>
+        </p:nvSpPr>
+        <p:spPr>
+          <a:xfrm>
+            <a:off x="640080" y="6364224"/>
+            <a:ext cx="4572000" cy="201168"/>
+          </a:xfrm>
+          <a:prstGeom prst="rect">
+            <a:avLst/>
+          </a:prstGeom>
+          <a:noFill/>
+          <a:ln/>
+        </p:spPr>
+        <p:txBody>
+          <a:bodyPr wrap="square" lIns="0" tIns="0" rIns="0" bIns="0" rtlCol="0" anchor="ctr"/>
+          <a:lstStyle/>
+          <a:p>
+            <a:pPr indent="0" marL="0">
+              <a:buNone/>
+            </a:pPr>
+            <a:r>
+              <a:rPr lang="en-US" sz="850" dirty="0">
+                <a:solidFill>
+                  <a:srgbClr val="6E7591"/>
+                </a:solidFill>
+                <a:latin typeface="Calibri" pitchFamily="34" charset="0"/>
+                <a:ea typeface="Calibri" pitchFamily="34" charset="-122"/>
+                <a:cs typeface="Calibri" pitchFamily="34" charset="-120"/>
+              </a:rPr>
+              <a:t>navi-delivery  ·  v0.1.0  ·  18 / 19</a:t>
+            </a:r>
+            <a:endParaRPr lang="en-US" sz="850" dirty="0"/>
+          </a:p>
+        </p:txBody>
+      </p:sp>
+      <p:sp>
+        <p:nvSpPr>
+          <p:cNvPr id="7" name="Shape 4"/>
+          <p:cNvSpPr/>
+          <p:nvPr/>
+        </p:nvSpPr>
+        <p:spPr>
+          <a:xfrm>
+            <a:off x="640080" y="1920240"/>
+            <a:ext cx="5852160" cy="2304288"/>
+          </a:xfrm>
+          <a:prstGeom prst="roundRect">
+            <a:avLst>
+              <a:gd name="adj" fmla="val 2381"/>
+            </a:avLst>
+          </a:prstGeom>
+          <a:solidFill>
+            <a:srgbClr val="0E2470"/>
+          </a:solidFill>
+          <a:ln w="12700">
+            <a:solidFill>
+              <a:srgbClr val="0E2470"/>
+            </a:solidFill>
+            <a:prstDash val="solid"/>
+          </a:ln>
+        </p:spPr>
+      </p:sp>
+      <p:sp>
+        <p:nvSpPr>
+          <p:cNvPr id="8" name="Text 5"/>
+          <p:cNvSpPr txBox="1"/>
+          <p:nvPr/>
+        </p:nvSpPr>
+        <p:spPr>
+          <a:xfrm>
+            <a:off x="896112" y="2066544"/>
+            <a:ext cx="5340096" cy="237744"/>
+          </a:xfrm>
+          <a:prstGeom prst="rect">
+            <a:avLst/>
+          </a:prstGeom>
+          <a:noFill/>
+          <a:ln/>
+        </p:spPr>
+        <p:txBody>
+          <a:bodyPr wrap="square" lIns="0" tIns="0" rIns="0" bIns="0" rtlCol="0" anchor="ctr"/>
+          <a:lstStyle/>
+          <a:p>
+            <a:pPr indent="0" marL="0">
+              <a:buNone/>
+            </a:pPr>
+            <a:r>
+              <a:rPr lang="en-US" sz="1250" b="1" dirty="0">
+                <a:solidFill>
+                  <a:srgbClr val="FAF3E7"/>
+                </a:solidFill>
+                <a:latin typeface="Mulish" pitchFamily="34" charset="0"/>
+                <a:ea typeface="Mulish" pitchFamily="34" charset="-122"/>
+                <a:cs typeface="Mulish" pitchFamily="34" charset="-120"/>
+              </a:rPr>
+              <a:t>The waterfall</a:t>
+            </a:r>
+            <a:endParaRPr lang="en-US" sz="1250" dirty="0"/>
+          </a:p>
+        </p:txBody>
+      </p:sp>
+      <p:sp>
+        <p:nvSpPr>
+          <p:cNvPr id="9" name="Text 6"/>
+          <p:cNvSpPr txBox="1"/>
+          <p:nvPr/>
+        </p:nvSpPr>
+        <p:spPr>
+          <a:xfrm>
+            <a:off x="896112" y="2377440"/>
+            <a:ext cx="5340096" cy="1188720"/>
+          </a:xfrm>
+          <a:prstGeom prst="rect">
+            <a:avLst/>
+          </a:prstGeom>
+          <a:noFill/>
+          <a:ln/>
+        </p:spPr>
+        <p:txBody>
+          <a:bodyPr wrap="square" lIns="0" tIns="0" rIns="0" bIns="0" rtlCol="0" anchor="t"/>
+          <a:lstStyle/>
+          <a:p>
+            <a:pPr indent="0" marL="0">
+              <a:lnSpc>
+                <a:spcPct val="150000"/>
+              </a:lnSpc>
+              <a:buNone/>
+            </a:pPr>
+            <a:r>
+              <a:rPr lang="en-US" sz="950" dirty="0">
+                <a:solidFill>
+                  <a:srgbClr val="E4DED3"/>
+                </a:solidFill>
+                <a:latin typeface="Consolas" pitchFamily="34" charset="0"/>
+                <a:ea typeface="Consolas" pitchFamily="34" charset="-122"/>
+                <a:cs typeface="Consolas" pitchFamily="34" charset="-120"/>
+              </a:rPr>
+              <a:t>change:add-csv-export        root</a:t>
+            </a:r>
+            <a:endParaRPr lang="en-US" sz="950" dirty="0"/>
+          </a:p>
+          <a:p>
+            <a:pPr indent="0" marL="0">
+              <a:lnSpc>
+                <a:spcPct val="150000"/>
+              </a:lnSpc>
+              <a:buNone/>
+            </a:pPr>
+            <a:r>
+              <a:rPr lang="en-US" sz="950" dirty="0">
+                <a:solidFill>
+                  <a:srgbClr val="E4DED3"/>
+                </a:solidFill>
+                <a:latin typeface="Consolas" pitchFamily="34" charset="0"/>
+                <a:ea typeface="Consolas" pitchFamily="34" charset="-122"/>
+                <a:cs typeface="Consolas" pitchFamily="34" charset="-120"/>
+              </a:rPr>
+              <a:t>├─ G1 pass                   status 1</a:t>
+            </a:r>
+            <a:endParaRPr lang="en-US" sz="950" dirty="0"/>
+          </a:p>
+          <a:p>
+            <a:pPr indent="0" marL="0">
+              <a:lnSpc>
+                <a:spcPct val="150000"/>
+              </a:lnSpc>
+              <a:buNone/>
+            </a:pPr>
+            <a:r>
+              <a:rPr lang="en-US" sz="950" dirty="0">
+                <a:solidFill>
+                  <a:srgbClr val="E4DED3"/>
+                </a:solidFill>
+                <a:latin typeface="Consolas" pitchFamily="34" charset="0"/>
+                <a:ea typeface="Consolas" pitchFamily="34" charset="-122"/>
+                <a:cs typeface="Consolas" pitchFamily="34" charset="-120"/>
+              </a:rPr>
+              <a:t>├─ G2 fail                   status 2</a:t>
+            </a:r>
+            <a:endParaRPr lang="en-US" sz="950" dirty="0"/>
+          </a:p>
+          <a:p>
+            <a:pPr indent="0" marL="0">
+              <a:lnSpc>
+                <a:spcPct val="150000"/>
+              </a:lnSpc>
+              <a:buNone/>
+            </a:pPr>
+            <a:r>
+              <a:rPr lang="en-US" sz="950" dirty="0">
+                <a:solidFill>
+                  <a:srgbClr val="E4DED3"/>
+                </a:solidFill>
+                <a:latin typeface="Consolas" pitchFamily="34" charset="0"/>
+                <a:ea typeface="Consolas" pitchFamily="34" charset="-122"/>
+                <a:cs typeface="Consolas" pitchFamily="34" charset="-120"/>
+              </a:rPr>
+              <a:t>├─ G2 pass                   attempt 2</a:t>
+            </a:r>
+            <a:endParaRPr lang="en-US" sz="950" dirty="0"/>
+          </a:p>
+          <a:p>
+            <a:pPr indent="0" marL="0">
+              <a:lnSpc>
+                <a:spcPct val="150000"/>
+              </a:lnSpc>
+              <a:buNone/>
+            </a:pPr>
+            <a:r>
+              <a:rPr lang="en-US" sz="950" dirty="0">
+                <a:solidFill>
+                  <a:srgbClr val="E4DED3"/>
+                </a:solidFill>
+                <a:latin typeface="Consolas" pitchFamily="34" charset="0"/>
+                <a:ea typeface="Consolas" pitchFamily="34" charset="-122"/>
+                <a:cs typeface="Consolas" pitchFamily="34" charset="-120"/>
+              </a:rPr>
+              <a:t>└─ G6 waived                 expires 2026-12-31</a:t>
+            </a:r>
+            <a:endParaRPr lang="en-US" sz="950" dirty="0"/>
+          </a:p>
+        </p:txBody>
+      </p:sp>
+      <p:sp>
+        <p:nvSpPr>
+          <p:cNvPr id="10" name="Text 7"/>
+          <p:cNvSpPr txBox="1"/>
+          <p:nvPr/>
+        </p:nvSpPr>
+        <p:spPr>
+          <a:xfrm>
+            <a:off x="896112" y="3657600"/>
+            <a:ext cx="5340096" cy="475488"/>
+          </a:xfrm>
+          <a:prstGeom prst="rect">
+            <a:avLst/>
+          </a:prstGeom>
+          <a:noFill/>
+          <a:ln/>
+        </p:spPr>
+        <p:txBody>
+          <a:bodyPr wrap="square" lIns="0" tIns="0" rIns="0" bIns="0" rtlCol="0" anchor="ctr"/>
+          <a:lstStyle/>
+          <a:p>
+            <a:pPr indent="0" marL="0">
+              <a:lnSpc>
+                <a:spcPct val="112000"/>
+              </a:lnSpc>
+              <a:buNone/>
+            </a:pPr>
+            <a:r>
+              <a:rPr lang="en-US" sz="900" dirty="0">
+                <a:solidFill>
+                  <a:srgbClr val="9BA2BA"/>
+                </a:solidFill>
+                <a:latin typeface="Calibri" pitchFamily="34" charset="0"/>
+                <a:ea typeface="Calibri" pitchFamily="34" charset="-122"/>
+                <a:cs typeface="Calibri" pitchFamily="34" charset="-120"/>
+              </a:rPr>
+              <a:t>A gate decision is an instant, so its span has no duration. The number a delivery dashboard wants — how long the change waited — is an attribute saying exactly that, not a fabricated duration.</a:t>
+            </a:r>
+            <a:endParaRPr lang="en-US" sz="900" dirty="0"/>
+          </a:p>
+        </p:txBody>
+      </p:sp>
+      <p:sp>
+        <p:nvSpPr>
+          <p:cNvPr id="11" name="Text 8"/>
+          <p:cNvSpPr txBox="1"/>
+          <p:nvPr/>
+        </p:nvSpPr>
+        <p:spPr>
+          <a:xfrm>
+            <a:off x="6903720" y="1920240"/>
+            <a:ext cx="4647895" cy="256032"/>
+          </a:xfrm>
+          <a:prstGeom prst="rect">
+            <a:avLst/>
+          </a:prstGeom>
+          <a:noFill/>
+          <a:ln/>
+        </p:spPr>
+        <p:txBody>
+          <a:bodyPr wrap="square" lIns="0" tIns="0" rIns="0" bIns="0" rtlCol="0" anchor="ctr"/>
+          <a:lstStyle/>
+          <a:p>
+            <a:pPr indent="0" marL="0">
+              <a:buNone/>
+            </a:pPr>
+            <a:r>
+              <a:rPr lang="en-US" sz="1250" b="1" dirty="0">
+                <a:solidFill>
+                  <a:srgbClr val="FAF3E7"/>
+                </a:solidFill>
+                <a:latin typeface="Mulish" pitchFamily="34" charset="0"/>
+                <a:ea typeface="Mulish" pitchFamily="34" charset="-122"/>
+                <a:cs typeface="Mulish" pitchFamily="34" charset="-120"/>
+              </a:rPr>
+              <a:t>Four backends, OTLP/HTTP JSON</a:t>
+            </a:r>
+            <a:endParaRPr lang="en-US" sz="1250" dirty="0"/>
+          </a:p>
+        </p:txBody>
+      </p:sp>
+      <p:sp>
+        <p:nvSpPr>
+          <p:cNvPr id="12" name="Shape 9"/>
+          <p:cNvSpPr/>
+          <p:nvPr/>
+        </p:nvSpPr>
+        <p:spPr>
+          <a:xfrm>
+            <a:off x="6903720" y="2286000"/>
+            <a:ext cx="4647895" cy="438912"/>
+          </a:xfrm>
+          <a:prstGeom prst="roundRect">
+            <a:avLst>
+              <a:gd name="adj" fmla="val 12500"/>
+            </a:avLst>
+          </a:prstGeom>
+          <a:solidFill>
+            <a:srgbClr val="192954"/>
+          </a:solidFill>
+          <a:ln w="12700">
+            <a:solidFill>
+              <a:srgbClr val="192954"/>
+            </a:solidFill>
+            <a:prstDash val="solid"/>
+          </a:ln>
+        </p:spPr>
+      </p:sp>
+      <p:sp>
+        <p:nvSpPr>
+          <p:cNvPr id="13" name="Text 10"/>
+          <p:cNvSpPr txBox="1"/>
+          <p:nvPr/>
+        </p:nvSpPr>
+        <p:spPr>
+          <a:xfrm>
+            <a:off x="7123176" y="2395728"/>
+            <a:ext cx="1371600" cy="237744"/>
+          </a:xfrm>
+          <a:prstGeom prst="rect">
+            <a:avLst/>
+          </a:prstGeom>
+          <a:noFill/>
+          <a:ln/>
+        </p:spPr>
+        <p:txBody>
+          <a:bodyPr wrap="square" lIns="0" tIns="0" rIns="0" bIns="0" rtlCol="0" anchor="ctr"/>
+          <a:lstStyle/>
+          <a:p>
+            <a:pPr indent="0" marL="0">
+              <a:buNone/>
+            </a:pPr>
+            <a:r>
+              <a:rPr lang="en-US" sz="1100" b="1" dirty="0">
+                <a:solidFill>
+                  <a:srgbClr val="FAF3E7"/>
+                </a:solidFill>
+                <a:latin typeface="Calibri" pitchFamily="34" charset="0"/>
+                <a:ea typeface="Calibri" pitchFamily="34" charset="-122"/>
+                <a:cs typeface="Calibri" pitchFamily="34" charset="-120"/>
+              </a:rPr>
+              <a:t>AgentObs</a:t>
+            </a:r>
+            <a:endParaRPr lang="en-US" sz="1100" dirty="0"/>
+          </a:p>
+        </p:txBody>
+      </p:sp>
+      <p:sp>
+        <p:nvSpPr>
+          <p:cNvPr id="14" name="Text 11"/>
+          <p:cNvSpPr txBox="1"/>
+          <p:nvPr/>
+        </p:nvSpPr>
+        <p:spPr>
+          <a:xfrm>
+            <a:off x="8531352" y="2404872"/>
+            <a:ext cx="2800807" cy="219456"/>
+          </a:xfrm>
+          <a:prstGeom prst="rect">
+            <a:avLst/>
+          </a:prstGeom>
+          <a:noFill/>
+          <a:ln/>
+        </p:spPr>
+        <p:txBody>
+          <a:bodyPr wrap="square" lIns="0" tIns="0" rIns="0" bIns="0" rtlCol="0" anchor="ctr"/>
+          <a:lstStyle/>
+          <a:p>
+            <a:pPr indent="0" marL="0">
+              <a:buNone/>
+            </a:pPr>
+            <a:r>
+              <a:rPr lang="en-US" sz="900" dirty="0">
+                <a:solidFill>
+                  <a:srgbClr val="E4DED3"/>
+                </a:solidFill>
+                <a:latin typeface="Calibri" pitchFamily="34" charset="0"/>
+                <a:ea typeface="Calibri" pitchFamily="34" charset="-122"/>
+                <a:cs typeface="Calibri" pitchFamily="34" charset="-120"/>
+              </a:rPr>
+              <a:t>X-Ingest-Key · direct OTLP ingestion</a:t>
+            </a:r>
+            <a:endParaRPr lang="en-US" sz="900" dirty="0"/>
+          </a:p>
+        </p:txBody>
+      </p:sp>
+      <p:sp>
+        <p:nvSpPr>
+          <p:cNvPr id="15" name="Shape 12"/>
+          <p:cNvSpPr/>
+          <p:nvPr/>
+        </p:nvSpPr>
+        <p:spPr>
+          <a:xfrm>
+            <a:off x="6903720" y="2798064"/>
+            <a:ext cx="4647895" cy="438912"/>
+          </a:xfrm>
+          <a:prstGeom prst="roundRect">
+            <a:avLst>
+              <a:gd name="adj" fmla="val 12500"/>
+            </a:avLst>
+          </a:prstGeom>
+          <a:solidFill>
+            <a:srgbClr val="0E2470"/>
+          </a:solidFill>
+          <a:ln w="12700">
+            <a:solidFill>
+              <a:srgbClr val="0E2470"/>
+            </a:solidFill>
+            <a:prstDash val="solid"/>
+          </a:ln>
+        </p:spPr>
+      </p:sp>
+      <p:sp>
+        <p:nvSpPr>
+          <p:cNvPr id="16" name="Text 13"/>
+          <p:cNvSpPr txBox="1"/>
+          <p:nvPr/>
+        </p:nvSpPr>
+        <p:spPr>
+          <a:xfrm>
+            <a:off x="7123176" y="2907792"/>
+            <a:ext cx="1371600" cy="237744"/>
+          </a:xfrm>
+          <a:prstGeom prst="rect">
+            <a:avLst/>
+          </a:prstGeom>
+          <a:noFill/>
+          <a:ln/>
+        </p:spPr>
+        <p:txBody>
+          <a:bodyPr wrap="square" lIns="0" tIns="0" rIns="0" bIns="0" rtlCol="0" anchor="ctr"/>
+          <a:lstStyle/>
+          <a:p>
+            <a:pPr indent="0" marL="0">
+              <a:buNone/>
+            </a:pPr>
+            <a:r>
+              <a:rPr lang="en-US" sz="1100" b="1" dirty="0">
+                <a:solidFill>
+                  <a:srgbClr val="FAF3E7"/>
+                </a:solidFill>
+                <a:latin typeface="Calibri" pitchFamily="34" charset="0"/>
+                <a:ea typeface="Calibri" pitchFamily="34" charset="-122"/>
+                <a:cs typeface="Calibri" pitchFamily="34" charset="-120"/>
+              </a:rPr>
+              <a:t>Opik</a:t>
+            </a:r>
+            <a:endParaRPr lang="en-US" sz="1100" dirty="0"/>
+          </a:p>
+        </p:txBody>
+      </p:sp>
+      <p:sp>
+        <p:nvSpPr>
+          <p:cNvPr id="17" name="Text 14"/>
+          <p:cNvSpPr txBox="1"/>
+          <p:nvPr/>
+        </p:nvSpPr>
+        <p:spPr>
+          <a:xfrm>
+            <a:off x="8531352" y="2916936"/>
+            <a:ext cx="2800807" cy="219456"/>
+          </a:xfrm>
+          <a:prstGeom prst="rect">
+            <a:avLst/>
+          </a:prstGeom>
+          <a:noFill/>
+          <a:ln/>
+        </p:spPr>
+        <p:txBody>
+          <a:bodyPr wrap="square" lIns="0" tIns="0" rIns="0" bIns="0" rtlCol="0" anchor="ctr"/>
+          <a:lstStyle/>
+          <a:p>
+            <a:pPr indent="0" marL="0">
+              <a:buNone/>
+            </a:pPr>
+            <a:r>
+              <a:rPr lang="en-US" sz="900" dirty="0">
+                <a:solidFill>
+                  <a:srgbClr val="E4DED3"/>
+                </a:solidFill>
+                <a:latin typeface="Calibri" pitchFamily="34" charset="0"/>
+                <a:ea typeface="Calibri" pitchFamily="34" charset="-122"/>
+                <a:cs typeface="Calibri" pitchFamily="34" charset="-120"/>
+              </a:rPr>
+              <a:t>Authorization · workspace + project</a:t>
+            </a:r>
+            <a:endParaRPr lang="en-US" sz="900" dirty="0"/>
+          </a:p>
+        </p:txBody>
+      </p:sp>
+      <p:sp>
+        <p:nvSpPr>
+          <p:cNvPr id="18" name="Shape 15"/>
+          <p:cNvSpPr/>
+          <p:nvPr/>
+        </p:nvSpPr>
+        <p:spPr>
+          <a:xfrm>
+            <a:off x="6903720" y="3310128"/>
+            <a:ext cx="4647895" cy="438912"/>
+          </a:xfrm>
+          <a:prstGeom prst="roundRect">
+            <a:avLst>
+              <a:gd name="adj" fmla="val 12500"/>
+            </a:avLst>
+          </a:prstGeom>
+          <a:solidFill>
+            <a:srgbClr val="192954"/>
+          </a:solidFill>
+          <a:ln w="12700">
+            <a:solidFill>
+              <a:srgbClr val="192954"/>
+            </a:solidFill>
+            <a:prstDash val="solid"/>
+          </a:ln>
+        </p:spPr>
+      </p:sp>
+      <p:sp>
+        <p:nvSpPr>
+          <p:cNvPr id="19" name="Text 16"/>
+          <p:cNvSpPr txBox="1"/>
+          <p:nvPr/>
+        </p:nvSpPr>
+        <p:spPr>
+          <a:xfrm>
+            <a:off x="7123176" y="3419856"/>
+            <a:ext cx="1371600" cy="237744"/>
+          </a:xfrm>
+          <a:prstGeom prst="rect">
+            <a:avLst/>
+          </a:prstGeom>
+          <a:noFill/>
+          <a:ln/>
+        </p:spPr>
+        <p:txBody>
+          <a:bodyPr wrap="square" lIns="0" tIns="0" rIns="0" bIns="0" rtlCol="0" anchor="ctr"/>
+          <a:lstStyle/>
+          <a:p>
+            <a:pPr indent="0" marL="0">
+              <a:buNone/>
+            </a:pPr>
+            <a:r>
+              <a:rPr lang="en-US" sz="1100" b="1" dirty="0">
+                <a:solidFill>
+                  <a:srgbClr val="FAF3E7"/>
+                </a:solidFill>
+                <a:latin typeface="Calibri" pitchFamily="34" charset="0"/>
+                <a:ea typeface="Calibri" pitchFamily="34" charset="-122"/>
+                <a:cs typeface="Calibri" pitchFamily="34" charset="-120"/>
+              </a:rPr>
+              <a:t>LangSmith</a:t>
+            </a:r>
+            <a:endParaRPr lang="en-US" sz="1100" dirty="0"/>
+          </a:p>
+        </p:txBody>
+      </p:sp>
+      <p:sp>
+        <p:nvSpPr>
+          <p:cNvPr id="20" name="Text 17"/>
+          <p:cNvSpPr txBox="1"/>
+          <p:nvPr/>
+        </p:nvSpPr>
+        <p:spPr>
+          <a:xfrm>
+            <a:off x="8531352" y="3429000"/>
+            <a:ext cx="2800807" cy="219456"/>
+          </a:xfrm>
+          <a:prstGeom prst="rect">
+            <a:avLst/>
+          </a:prstGeom>
+          <a:noFill/>
+          <a:ln/>
+        </p:spPr>
+        <p:txBody>
+          <a:bodyPr wrap="square" lIns="0" tIns="0" rIns="0" bIns="0" rtlCol="0" anchor="ctr"/>
+          <a:lstStyle/>
+          <a:p>
+            <a:pPr indent="0" marL="0">
+              <a:buNone/>
+            </a:pPr>
+            <a:r>
+              <a:rPr lang="en-US" sz="900" dirty="0">
+                <a:solidFill>
+                  <a:srgbClr val="E4DED3"/>
+                </a:solidFill>
+                <a:latin typeface="Calibri" pitchFamily="34" charset="0"/>
+                <a:ea typeface="Calibri" pitchFamily="34" charset="-122"/>
+                <a:cs typeface="Calibri" pitchFamily="34" charset="-120"/>
+              </a:rPr>
+              <a:t>x-api-key · Langsmith-Project</a:t>
+            </a:r>
+            <a:endParaRPr lang="en-US" sz="900" dirty="0"/>
+          </a:p>
+        </p:txBody>
+      </p:sp>
+      <p:sp>
+        <p:nvSpPr>
+          <p:cNvPr id="21" name="Shape 18"/>
+          <p:cNvSpPr/>
+          <p:nvPr/>
+        </p:nvSpPr>
+        <p:spPr>
+          <a:xfrm>
+            <a:off x="6903720" y="3822192"/>
+            <a:ext cx="4647895" cy="438912"/>
+          </a:xfrm>
+          <a:prstGeom prst="roundRect">
+            <a:avLst>
+              <a:gd name="adj" fmla="val 12500"/>
+            </a:avLst>
+          </a:prstGeom>
+          <a:solidFill>
+            <a:srgbClr val="0E2470"/>
+          </a:solidFill>
+          <a:ln w="12700">
+            <a:solidFill>
+              <a:srgbClr val="0E2470"/>
+            </a:solidFill>
+            <a:prstDash val="solid"/>
+          </a:ln>
+        </p:spPr>
+      </p:sp>
+      <p:sp>
+        <p:nvSpPr>
+          <p:cNvPr id="22" name="Text 19"/>
+          <p:cNvSpPr txBox="1"/>
+          <p:nvPr/>
+        </p:nvSpPr>
+        <p:spPr>
+          <a:xfrm>
+            <a:off x="7123176" y="3931920"/>
+            <a:ext cx="1371600" cy="237744"/>
+          </a:xfrm>
+          <a:prstGeom prst="rect">
+            <a:avLst/>
+          </a:prstGeom>
+          <a:noFill/>
+          <a:ln/>
+        </p:spPr>
+        <p:txBody>
+          <a:bodyPr wrap="square" lIns="0" tIns="0" rIns="0" bIns="0" rtlCol="0" anchor="ctr"/>
+          <a:lstStyle/>
+          <a:p>
+            <a:pPr indent="0" marL="0">
+              <a:buNone/>
+            </a:pPr>
+            <a:r>
+              <a:rPr lang="en-US" sz="1100" b="1" dirty="0">
+                <a:solidFill>
+                  <a:srgbClr val="FAF3E7"/>
+                </a:solidFill>
+                <a:latin typeface="Calibri" pitchFamily="34" charset="0"/>
+                <a:ea typeface="Calibri" pitchFamily="34" charset="-122"/>
+                <a:cs typeface="Calibri" pitchFamily="34" charset="-120"/>
+              </a:rPr>
+              <a:t>Any OTLP</a:t>
+            </a:r>
+            <a:endParaRPr lang="en-US" sz="1100" dirty="0"/>
+          </a:p>
+        </p:txBody>
+      </p:sp>
+      <p:sp>
+        <p:nvSpPr>
+          <p:cNvPr id="23" name="Text 20"/>
+          <p:cNvSpPr txBox="1"/>
+          <p:nvPr/>
+        </p:nvSpPr>
+        <p:spPr>
+          <a:xfrm>
+            <a:off x="8531352" y="3941064"/>
+            <a:ext cx="2800807" cy="219456"/>
+          </a:xfrm>
+          <a:prstGeom prst="rect">
+            <a:avLst/>
+          </a:prstGeom>
+          <a:noFill/>
+          <a:ln/>
+        </p:spPr>
+        <p:txBody>
+          <a:bodyPr wrap="square" lIns="0" tIns="0" rIns="0" bIns="0" rtlCol="0" anchor="ctr"/>
+          <a:lstStyle/>
+          <a:p>
+            <a:pPr indent="0" marL="0">
+              <a:buNone/>
+            </a:pPr>
+            <a:r>
+              <a:rPr lang="en-US" sz="900" dirty="0">
+                <a:solidFill>
+                  <a:srgbClr val="E4DED3"/>
+                </a:solidFill>
+                <a:latin typeface="Calibri" pitchFamily="34" charset="0"/>
+                <a:ea typeface="Calibri" pitchFamily="34" charset="-122"/>
+                <a:cs typeface="Calibri" pitchFamily="34" charset="-120"/>
+              </a:rPr>
+              <a:t>headers verbatim · a collector or another vendor</a:t>
+            </a:r>
+            <a:endParaRPr lang="en-US" sz="900" dirty="0"/>
+          </a:p>
+        </p:txBody>
+      </p:sp>
+      <p:sp>
+        <p:nvSpPr>
+          <p:cNvPr id="24" name="Shape 21"/>
+          <p:cNvSpPr/>
+          <p:nvPr/>
+        </p:nvSpPr>
+        <p:spPr>
+          <a:xfrm>
+            <a:off x="640080" y="4370832"/>
+            <a:ext cx="10911535" cy="914400"/>
+          </a:xfrm>
+          <a:prstGeom prst="roundRect">
+            <a:avLst>
+              <a:gd name="adj" fmla="val 6000"/>
+            </a:avLst>
+          </a:prstGeom>
+          <a:solidFill>
+            <a:srgbClr val="192954"/>
+          </a:solidFill>
+          <a:ln w="12700">
+            <a:solidFill>
+              <a:srgbClr val="192954"/>
+            </a:solidFill>
+            <a:prstDash val="solid"/>
+          </a:ln>
+        </p:spPr>
+      </p:sp>
+      <p:sp>
+        <p:nvSpPr>
+          <p:cNvPr id="25" name="Text 22"/>
+          <p:cNvSpPr txBox="1"/>
+          <p:nvPr/>
+        </p:nvSpPr>
+        <p:spPr>
+          <a:xfrm>
+            <a:off x="896112" y="4498848"/>
+            <a:ext cx="10399471" cy="237744"/>
+          </a:xfrm>
+          <a:prstGeom prst="rect">
+            <a:avLst/>
+          </a:prstGeom>
+          <a:noFill/>
+          <a:ln/>
+        </p:spPr>
+        <p:txBody>
+          <a:bodyPr wrap="square" lIns="0" tIns="0" rIns="0" bIns="0" rtlCol="0" anchor="ctr"/>
+          <a:lstStyle/>
+          <a:p>
+            <a:pPr indent="0" marL="0">
+              <a:buNone/>
+            </a:pPr>
+            <a:r>
+              <a:rPr lang="en-US" sz="1150" b="1" dirty="0">
+                <a:solidFill>
+                  <a:srgbClr val="FAF3E7"/>
+                </a:solidFill>
+                <a:latin typeface="Calibri" pitchFamily="34" charset="0"/>
+                <a:ea typeface="Calibri" pitchFamily="34" charset="-122"/>
+                <a:cs typeface="Calibri" pitchFamily="34" charset="-120"/>
+              </a:rPr>
+              <a:t>What it exports is the ledger — not the agents' model calls</a:t>
+            </a:r>
+            <a:endParaRPr lang="en-US" sz="1150" dirty="0"/>
+          </a:p>
+        </p:txBody>
+      </p:sp>
+      <p:sp>
+        <p:nvSpPr>
+          <p:cNvPr id="26" name="Text 23"/>
+          <p:cNvSpPr txBox="1"/>
+          <p:nvPr/>
+        </p:nvSpPr>
+        <p:spPr>
+          <a:xfrm>
+            <a:off x="896112" y="4754880"/>
+            <a:ext cx="10399471" cy="457200"/>
+          </a:xfrm>
+          <a:prstGeom prst="rect">
+            <a:avLst/>
+          </a:prstGeom>
+          <a:noFill/>
+          <a:ln/>
+        </p:spPr>
+        <p:txBody>
+          <a:bodyPr wrap="square" lIns="0" tIns="0" rIns="0" bIns="0" rtlCol="0" anchor="ctr"/>
+          <a:lstStyle/>
+          <a:p>
+            <a:pPr indent="0" marL="0">
+              <a:lnSpc>
+                <a:spcPct val="112000"/>
+              </a:lnSpc>
+              <a:buNone/>
+            </a:pPr>
+            <a:r>
+              <a:rPr lang="en-US" sz="950" dirty="0">
+                <a:solidFill>
+                  <a:srgbClr val="E4DED3"/>
+                </a:solidFill>
+                <a:latin typeface="Calibri" pitchFamily="34" charset="0"/>
+                <a:ea typeface="Calibri" pitchFamily="34" charset="-122"/>
+                <a:cs typeface="Calibri" pitchFamily="34" charset="-120"/>
+              </a:rPr>
+              <a:t>Who recorded which gate, when, with what evidence, how long the change waited, how many times a gate was re-recorded. The CLI makes no model calls, so it has none to report — and claiming otherwise would be exactly the promise this framework's own skills exist to stop people making.</a:t>
+            </a:r>
+            <a:endParaRPr lang="en-US" sz="950" dirty="0"/>
+          </a:p>
+        </p:txBody>
+      </p:sp>
+      <p:sp>
+        <p:nvSpPr>
+          <p:cNvPr id="27" name="Shape 24"/>
+          <p:cNvSpPr/>
+          <p:nvPr/>
+        </p:nvSpPr>
+        <p:spPr>
+          <a:xfrm>
+            <a:off x="640080" y="5431536"/>
+            <a:ext cx="10911535" cy="877824"/>
+          </a:xfrm>
+          <a:prstGeom prst="roundRect">
+            <a:avLst>
+              <a:gd name="adj" fmla="val 6250"/>
+            </a:avLst>
+          </a:prstGeom>
+          <a:solidFill>
+            <a:srgbClr val="0D131F"/>
+          </a:solidFill>
+          <a:ln w="12700">
+            <a:solidFill>
+              <a:srgbClr val="2A2F45"/>
+            </a:solidFill>
+            <a:prstDash val="solid"/>
+          </a:ln>
+        </p:spPr>
+      </p:sp>
+      <p:sp>
+        <p:nvSpPr>
+          <p:cNvPr id="28" name="Text 25"/>
+          <p:cNvSpPr txBox="1"/>
+          <p:nvPr/>
+        </p:nvSpPr>
+        <p:spPr>
+          <a:xfrm>
+            <a:off x="896112" y="5541264"/>
+            <a:ext cx="10399471" cy="237744"/>
+          </a:xfrm>
+          <a:prstGeom prst="rect">
+            <a:avLst/>
+          </a:prstGeom>
+          <a:noFill/>
+          <a:ln/>
+        </p:spPr>
+        <p:txBody>
+          <a:bodyPr wrap="square" lIns="0" tIns="0" rIns="0" bIns="0" rtlCol="0" anchor="ctr"/>
+          <a:lstStyle/>
+          <a:p>
+            <a:pPr indent="0" marL="0">
+              <a:buNone/>
+            </a:pPr>
+            <a:r>
+              <a:rPr lang="en-US" sz="1100" b="1" dirty="0">
+                <a:solidFill>
+                  <a:srgbClr val="E08A72"/>
+                </a:solidFill>
+                <a:latin typeface="Calibri" pitchFamily="34" charset="0"/>
+                <a:ea typeface="Calibri" pitchFamily="34" charset="-122"/>
+                <a:cs typeface="Calibri" pitchFamily="34" charset="-120"/>
+              </a:rPr>
+              <a:t>The one way this can silently do nothing</a:t>
+            </a:r>
+            <a:endParaRPr lang="en-US" sz="1100" dirty="0"/>
+          </a:p>
+        </p:txBody>
+      </p:sp>
+      <p:sp>
+        <p:nvSpPr>
+          <p:cNvPr id="29" name="Text 26"/>
+          <p:cNvSpPr txBox="1"/>
+          <p:nvPr/>
+        </p:nvSpPr>
+        <p:spPr>
+          <a:xfrm>
+            <a:off x="896112" y="5797296"/>
+            <a:ext cx="10399471" cy="457200"/>
+          </a:xfrm>
+          <a:prstGeom prst="rect">
+            <a:avLst/>
+          </a:prstGeom>
+          <a:noFill/>
+          <a:ln/>
+        </p:spPr>
+        <p:txBody>
+          <a:bodyPr wrap="square" lIns="0" tIns="0" rIns="0" bIns="0" rtlCol="0" anchor="ctr"/>
+          <a:lstStyle/>
+          <a:p>
+            <a:pPr indent="0" marL="0">
+              <a:lnSpc>
+                <a:spcPct val="112000"/>
+              </a:lnSpc>
+              <a:buNone/>
+            </a:pPr>
+            <a:r>
+              <a:rPr lang="en-US" sz="900" dirty="0">
+                <a:solidFill>
+                  <a:srgbClr val="9BA2BA"/>
+                </a:solidFill>
+                <a:latin typeface="Calibri" pitchFamily="34" charset="0"/>
+                <a:ea typeface="Calibri" pitchFamily="34" charset="-122"/>
+                <a:cs typeface="Calibri" pitchFamily="34" charset="-120"/>
+              </a:rPr>
+              <a:t>llm.span.kind is AgentObs's own convention. It renders only the kinds it recognises; one it does not know is accepted, stored, and shown on no screen — with no error on either side. Probe it before trusting a dashboard. Credentials come from the environment only, are never printed, and never reach the local record of what was sent.</a:t>
+            </a:r>
+            <a:endParaRPr lang="en-US" sz="900" dirty="0"/>
+          </a:p>
+        </p:txBody>
+      </p:sp>
+    </p:spTree>
+  </p:cSld>
+  <p:clrMapOvr>
+    <a:masterClrMapping/>
+  </p:clrMapOvr>
+</p:sld>
+</file>
+
+<file path=ppt/slides/slide19.xml><?xml version="1.0" encoding="utf-8"?>
+<p:sld xmlns:a="http://schemas.openxmlformats.org/drawingml/2006/main" xmlns:r="http://schemas.openxmlformats.org/officeDocument/2006/relationships" xmlns:p="http://schemas.openxmlformats.org/presentationml/2006/main">
+  <p:cSld name="Slide 19">
     <p:bg>
       <p:bgPr>
         <a:solidFill>
@@ -13217,6 +16224,162 @@
       <p:sp>
         <p:nvSpPr>
           <p:cNvPr id="18" name="Text 15"/>
+          <p:cNvSpPr txBox="1"/>
+          <p:nvPr/>
+        </p:nvSpPr>
+        <p:spPr>
+          <a:xfrm>
+            <a:off x="640080" y="5961888"/>
+            <a:ext cx="2377440" cy="274320"/>
+          </a:xfrm>
+          <a:prstGeom prst="rect">
+            <a:avLst/>
+          </a:prstGeom>
+          <a:noFill/>
+          <a:ln/>
+        </p:spPr>
+        <p:txBody>
+          <a:bodyPr wrap="square" lIns="0" tIns="0" rIns="0" bIns="0" rtlCol="0" anchor="ctr"/>
+          <a:lstStyle/>
+          <a:p>
+            <a:pPr indent="0" marL="0">
+              <a:buNone/>
+            </a:pPr>
+            <a:r>
+              <a:rPr lang="en-US" sz="1150" b="1" dirty="0">
+                <a:solidFill>
+                  <a:srgbClr val="FAF3E7"/>
+                </a:solidFill>
+                <a:latin typeface="Consolas" pitchFamily="34" charset="0"/>
+                <a:ea typeface="Consolas" pitchFamily="34" charset="-122"/>
+                <a:cs typeface="Consolas" pitchFamily="34" charset="-120"/>
+              </a:rPr>
+              <a:t>docs/TELEMETRY.md</a:t>
+            </a:r>
+            <a:endParaRPr lang="en-US" sz="1150" dirty="0"/>
+          </a:p>
+        </p:txBody>
+      </p:sp>
+      <p:sp>
+        <p:nvSpPr>
+          <p:cNvPr id="19" name="Text 16"/>
+          <p:cNvSpPr txBox="1"/>
+          <p:nvPr/>
+        </p:nvSpPr>
+        <p:spPr>
+          <a:xfrm>
+            <a:off x="3108960" y="5980176"/>
+            <a:ext cx="2804008" cy="274320"/>
+          </a:xfrm>
+          <a:prstGeom prst="rect">
+            <a:avLst/>
+          </a:prstGeom>
+          <a:noFill/>
+          <a:ln/>
+        </p:spPr>
+        <p:txBody>
+          <a:bodyPr wrap="square" lIns="0" tIns="0" rIns="0" bIns="0" rtlCol="0" anchor="ctr"/>
+          <a:lstStyle/>
+          <a:p>
+            <a:pPr indent="0" marL="0">
+              <a:buNone/>
+            </a:pPr>
+            <a:r>
+              <a:rPr lang="en-US" sz="1050" dirty="0">
+                <a:solidFill>
+                  <a:srgbClr val="9BA2BA"/>
+                </a:solidFill>
+                <a:latin typeface="Calibri" pitchFamily="34" charset="0"/>
+                <a:ea typeface="Calibri" pitchFamily="34" charset="-122"/>
+                <a:cs typeface="Calibri" pitchFamily="34" charset="-120"/>
+              </a:rPr>
+              <a:t>the span model and the silent-failure trap</a:t>
+            </a:r>
+            <a:endParaRPr lang="en-US" sz="1050" dirty="0"/>
+          </a:p>
+        </p:txBody>
+      </p:sp>
+      <p:sp>
+        <p:nvSpPr>
+          <p:cNvPr id="20" name="Text 17"/>
+          <p:cNvSpPr txBox="1"/>
+          <p:nvPr/>
+        </p:nvSpPr>
+        <p:spPr>
+          <a:xfrm>
+            <a:off x="6278728" y="5961888"/>
+            <a:ext cx="2377440" cy="274320"/>
+          </a:xfrm>
+          <a:prstGeom prst="rect">
+            <a:avLst/>
+          </a:prstGeom>
+          <a:noFill/>
+          <a:ln/>
+        </p:spPr>
+        <p:txBody>
+          <a:bodyPr wrap="square" lIns="0" tIns="0" rIns="0" bIns="0" rtlCol="0" anchor="ctr"/>
+          <a:lstStyle/>
+          <a:p>
+            <a:pPr indent="0" marL="0">
+              <a:buNone/>
+            </a:pPr>
+            <a:r>
+              <a:rPr lang="en-US" sz="1150" b="1" dirty="0">
+                <a:solidFill>
+                  <a:srgbClr val="FAF3E7"/>
+                </a:solidFill>
+                <a:latin typeface="Consolas" pitchFamily="34" charset="0"/>
+                <a:ea typeface="Consolas" pitchFamily="34" charset="-122"/>
+                <a:cs typeface="Consolas" pitchFamily="34" charset="-120"/>
+              </a:rPr>
+              <a:t>config/mcp/README.md</a:t>
+            </a:r>
+            <a:endParaRPr lang="en-US" sz="1150" dirty="0"/>
+          </a:p>
+        </p:txBody>
+      </p:sp>
+      <p:sp>
+        <p:nvSpPr>
+          <p:cNvPr id="21" name="Text 18"/>
+          <p:cNvSpPr txBox="1"/>
+          <p:nvPr/>
+        </p:nvSpPr>
+        <p:spPr>
+          <a:xfrm>
+            <a:off x="8747608" y="5980176"/>
+            <a:ext cx="2804008" cy="274320"/>
+          </a:xfrm>
+          <a:prstGeom prst="rect">
+            <a:avLst/>
+          </a:prstGeom>
+          <a:noFill/>
+          <a:ln/>
+        </p:spPr>
+        <p:txBody>
+          <a:bodyPr wrap="square" lIns="0" tIns="0" rIns="0" bIns="0" rtlCol="0" anchor="ctr"/>
+          <a:lstStyle/>
+          <a:p>
+            <a:pPr indent="0" marL="0">
+              <a:buNone/>
+            </a:pPr>
+            <a:r>
+              <a:rPr lang="en-US" sz="1050" dirty="0">
+                <a:solidFill>
+                  <a:srgbClr val="9BA2BA"/>
+                </a:solidFill>
+                <a:latin typeface="Calibri" pitchFamily="34" charset="0"/>
+                <a:ea typeface="Calibri" pitchFamily="34" charset="-122"/>
+                <a:cs typeface="Calibri" pitchFamily="34" charset="-120"/>
+              </a:rPr>
+              <a:t>connecting Jira, ADO and Confluence</a:t>
+            </a:r>
+            <a:endParaRPr lang="en-US" sz="1050" dirty="0"/>
+          </a:p>
+        </p:txBody>
+      </p:sp>
+      <p:sp>
+        <p:nvSpPr>
+          <p:cNvPr id="22" name="Text 19"/>
           <p:cNvSpPr txBox="1"/>
           <p:nvPr/>
         </p:nvSpPr>
@@ -13459,7 +16622,7 @@
                 <a:ea typeface="Calibri" pitchFamily="34" charset="-122"/>
                 <a:cs typeface="Calibri" pitchFamily="34" charset="-120"/>
               </a:rPr>
-              <a:t>navi-delivery  ·  v0.1.0  ·  2 / 17</a:t>
+              <a:t>navi-delivery  ·  v0.1.0  ·  2 / 19</a:t>
             </a:r>
             <a:endParaRPr lang="en-US" sz="850" dirty="0"/>
           </a:p>
@@ -14151,7 +17314,7 @@
                 <a:ea typeface="Calibri" pitchFamily="34" charset="-122"/>
                 <a:cs typeface="Calibri" pitchFamily="34" charset="-120"/>
               </a:rPr>
-              <a:t>navi-delivery  ·  v0.1.0  ·  3 / 17</a:t>
+              <a:t>navi-delivery  ·  v0.1.0  ·  3 / 19</a:t>
             </a:r>
             <a:endParaRPr lang="en-US" sz="850" dirty="0"/>
           </a:p>
@@ -14488,7 +17651,7 @@
                 <a:ea typeface="Mulish" pitchFamily="34" charset="-122"/>
                 <a:cs typeface="Mulish" pitchFamily="34" charset="-120"/>
               </a:rPr>
-              <a:t>39</a:t>
+              <a:t>49</a:t>
             </a:r>
             <a:endParaRPr lang="en-US" sz="3000" dirty="0"/>
           </a:p>
@@ -15242,7 +18405,7 @@
                 <a:ea typeface="Calibri" pitchFamily="34" charset="-122"/>
                 <a:cs typeface="Calibri" pitchFamily="34" charset="-120"/>
               </a:rPr>
-              <a:t>navi-delivery  ·  v0.1.0  ·  4 / 17</a:t>
+              <a:t>navi-delivery  ·  v0.1.0  ·  4 / 19</a:t>
             </a:r>
             <a:endParaRPr lang="en-US" sz="850" dirty="0"/>
           </a:p>
@@ -16481,7 +19644,7 @@
                 <a:ea typeface="Calibri" pitchFamily="34" charset="-122"/>
                 <a:cs typeface="Calibri" pitchFamily="34" charset="-120"/>
               </a:rPr>
-              <a:t>ELEVEN AGENTS</a:t>
+              <a:t>11 AGENTS</a:t>
             </a:r>
             <a:endParaRPr lang="en-US" sz="1000" dirty="0"/>
           </a:p>
@@ -16622,7 +19785,7 @@
                 <a:ea typeface="Calibri" pitchFamily="34" charset="-122"/>
                 <a:cs typeface="Calibri" pitchFamily="34" charset="-120"/>
               </a:rPr>
-              <a:t>navi-delivery  ·  v0.1.0  ·  5 / 17</a:t>
+              <a:t>navi-delivery  ·  v0.1.0  ·  5 / 19</a:t>
             </a:r>
             <a:endParaRPr lang="en-US" sz="850" dirty="0"/>
           </a:p>
@@ -18346,7 +21509,7 @@
                 <a:ea typeface="Calibri" pitchFamily="34" charset="-122"/>
                 <a:cs typeface="Calibri" pitchFamily="34" charset="-120"/>
               </a:rPr>
-              <a:t>THIRTY-NINE SKILLS</a:t>
+              <a:t>49 SKILLS</a:t>
             </a:r>
             <a:endParaRPr lang="en-US" sz="1000" dirty="0"/>
           </a:p>
@@ -18385,7 +21548,7 @@
                 <a:ea typeface="Mulish" pitchFamily="34" charset="-122"/>
                 <a:cs typeface="Mulish" pitchFamily="34" charset="-120"/>
               </a:rPr>
-              <a:t>Twelve disciplines, and every skill the same shape</a:t>
+              <a:t>13 disciplines, and every skill the same shape</a:t>
             </a:r>
             <a:endParaRPr lang="en-US" sz="3100" dirty="0"/>
           </a:p>
@@ -18487,7 +21650,7 @@
                 <a:ea typeface="Calibri" pitchFamily="34" charset="-122"/>
                 <a:cs typeface="Calibri" pitchFamily="34" charset="-120"/>
               </a:rPr>
-              <a:t>navi-delivery  ·  v0.1.0  ·  6 / 17</a:t>
+              <a:t>navi-delivery  ·  v0.1.0  ·  6 / 19</a:t>
             </a:r>
             <a:endParaRPr lang="en-US" sz="850" dirty="0"/>
           </a:p>
@@ -18526,7 +21689,7 @@
                 <a:ea typeface="Calibri" pitchFamily="34" charset="-122"/>
                 <a:cs typeface="Calibri" pitchFamily="34" charset="-120"/>
               </a:rPr>
-              <a:t>lifecycle-method</a:t>
+              <a:t>software-development</a:t>
             </a:r>
             <a:endParaRPr lang="en-US" sz="1150" dirty="0"/>
           </a:p>
@@ -18619,7 +21782,7 @@
                 <a:ea typeface="Mulish" pitchFamily="34" charset="-122"/>
                 <a:cs typeface="Mulish" pitchFamily="34" charset="-120"/>
               </a:rPr>
-              <a:t>6</a:t>
+              <a:t>9</a:t>
             </a:r>
             <a:endParaRPr lang="en-US" sz="1150" dirty="0"/>
           </a:p>
@@ -18633,7 +21796,7 @@
         </p:nvSpPr>
         <p:spPr>
           <a:xfrm>
-            <a:off x="640080" y="2359152"/>
+            <a:off x="640080" y="2304288"/>
             <a:ext cx="2331720" cy="274320"/>
           </a:xfrm>
           <a:prstGeom prst="rect">
@@ -18658,7 +21821,7 @@
                 <a:ea typeface="Calibri" pitchFamily="34" charset="-122"/>
                 <a:cs typeface="Calibri" pitchFamily="34" charset="-120"/>
               </a:rPr>
-              <a:t>software-development</a:t>
+              <a:t>platform-devops</a:t>
             </a:r>
             <a:endParaRPr lang="en-US" sz="1150" dirty="0"/>
           </a:p>
@@ -18672,7 +21835,7 @@
         </p:nvSpPr>
         <p:spPr>
           <a:xfrm>
-            <a:off x="3063240" y="2404872"/>
+            <a:off x="3063240" y="2350008"/>
             <a:ext cx="2346808" cy="201168"/>
           </a:xfrm>
           <a:prstGeom prst="roundRect">
@@ -18699,8 +21862,8 @@
         </p:nvSpPr>
         <p:spPr>
           <a:xfrm>
-            <a:off x="3063240" y="2404872"/>
-            <a:ext cx="1955673" cy="201168"/>
+            <a:off x="3063240" y="2350008"/>
+            <a:ext cx="2086051" cy="201168"/>
           </a:xfrm>
           <a:prstGeom prst="roundRect">
             <a:avLst>
@@ -18726,7 +21889,7 @@
         </p:nvSpPr>
         <p:spPr>
           <a:xfrm>
-            <a:off x="5519776" y="2359152"/>
+            <a:off x="5519776" y="2304288"/>
             <a:ext cx="320040" cy="274320"/>
           </a:xfrm>
           <a:prstGeom prst="rect">
@@ -18751,7 +21914,7 @@
                 <a:ea typeface="Mulish" pitchFamily="34" charset="-122"/>
                 <a:cs typeface="Mulish" pitchFamily="34" charset="-120"/>
               </a:rPr>
-              <a:t>5</a:t>
+              <a:t>8</a:t>
             </a:r>
             <a:endParaRPr lang="en-US" sz="1150" dirty="0"/>
           </a:p>
@@ -18765,7 +21928,7 @@
         </p:nvSpPr>
         <p:spPr>
           <a:xfrm>
-            <a:off x="640080" y="2816352"/>
+            <a:off x="640080" y="2706624"/>
             <a:ext cx="2331720" cy="274320"/>
           </a:xfrm>
           <a:prstGeom prst="rect">
@@ -18790,7 +21953,7 @@
                 <a:ea typeface="Calibri" pitchFamily="34" charset="-122"/>
                 <a:cs typeface="Calibri" pitchFamily="34" charset="-120"/>
               </a:rPr>
-              <a:t>architecture</a:t>
+              <a:t>lifecycle-method</a:t>
             </a:r>
             <a:endParaRPr lang="en-US" sz="1150" dirty="0"/>
           </a:p>
@@ -18804,7 +21967,7 @@
         </p:nvSpPr>
         <p:spPr>
           <a:xfrm>
-            <a:off x="3063240" y="2862072"/>
+            <a:off x="3063240" y="2752344"/>
             <a:ext cx="2346808" cy="201168"/>
           </a:xfrm>
           <a:prstGeom prst="roundRect">
@@ -18831,7 +21994,7 @@
         </p:nvSpPr>
         <p:spPr>
           <a:xfrm>
-            <a:off x="3063240" y="2862072"/>
+            <a:off x="3063240" y="2752344"/>
             <a:ext cx="1564538" cy="201168"/>
           </a:xfrm>
           <a:prstGeom prst="roundRect">
@@ -18858,7 +22021,7 @@
         </p:nvSpPr>
         <p:spPr>
           <a:xfrm>
-            <a:off x="5519776" y="2816352"/>
+            <a:off x="5519776" y="2706624"/>
             <a:ext cx="320040" cy="274320"/>
           </a:xfrm>
           <a:prstGeom prst="rect">
@@ -18883,7 +22046,7 @@
                 <a:ea typeface="Mulish" pitchFamily="34" charset="-122"/>
                 <a:cs typeface="Mulish" pitchFamily="34" charset="-120"/>
               </a:rPr>
-              <a:t>4</a:t>
+              <a:t>6</a:t>
             </a:r>
             <a:endParaRPr lang="en-US" sz="1150" dirty="0"/>
           </a:p>
@@ -18897,7 +22060,7 @@
         </p:nvSpPr>
         <p:spPr>
           <a:xfrm>
-            <a:off x="640080" y="3273552"/>
+            <a:off x="640080" y="3108960"/>
             <a:ext cx="2331720" cy="274320"/>
           </a:xfrm>
           <a:prstGeom prst="rect">
@@ -18922,7 +22085,7 @@
                 <a:ea typeface="Calibri" pitchFamily="34" charset="-122"/>
                 <a:cs typeface="Calibri" pitchFamily="34" charset="-120"/>
               </a:rPr>
-              <a:t>platform-devops</a:t>
+              <a:t>architecture</a:t>
             </a:r>
             <a:endParaRPr lang="en-US" sz="1150" dirty="0"/>
           </a:p>
@@ -18936,7 +22099,7 @@
         </p:nvSpPr>
         <p:spPr>
           <a:xfrm>
-            <a:off x="3063240" y="3319272"/>
+            <a:off x="3063240" y="3154680"/>
             <a:ext cx="2346808" cy="201168"/>
           </a:xfrm>
           <a:prstGeom prst="roundRect">
@@ -18963,8 +22126,8 @@
         </p:nvSpPr>
         <p:spPr>
           <a:xfrm>
-            <a:off x="3063240" y="3319272"/>
-            <a:ext cx="1564538" cy="201168"/>
+            <a:off x="3063240" y="3154680"/>
+            <a:ext cx="1043026" cy="201168"/>
           </a:xfrm>
           <a:prstGeom prst="roundRect">
             <a:avLst>
@@ -18990,7 +22153,7 @@
         </p:nvSpPr>
         <p:spPr>
           <a:xfrm>
-            <a:off x="5519776" y="3273552"/>
+            <a:off x="5519776" y="3108960"/>
             <a:ext cx="320040" cy="274320"/>
           </a:xfrm>
           <a:prstGeom prst="rect">
@@ -19029,7 +22192,7 @@
         </p:nvSpPr>
         <p:spPr>
           <a:xfrm>
-            <a:off x="640080" y="3730752"/>
+            <a:off x="640080" y="3511296"/>
             <a:ext cx="2331720" cy="274320"/>
           </a:xfrm>
           <a:prstGeom prst="rect">
@@ -19068,7 +22231,7 @@
         </p:nvSpPr>
         <p:spPr>
           <a:xfrm>
-            <a:off x="3063240" y="3776472"/>
+            <a:off x="3063240" y="3557016"/>
             <a:ext cx="2346808" cy="201168"/>
           </a:xfrm>
           <a:prstGeom prst="roundRect">
@@ -19095,8 +22258,8 @@
         </p:nvSpPr>
         <p:spPr>
           <a:xfrm>
-            <a:off x="3063240" y="3776472"/>
-            <a:ext cx="1564538" cy="201168"/>
+            <a:off x="3063240" y="3557016"/>
+            <a:ext cx="1043026" cy="201168"/>
           </a:xfrm>
           <a:prstGeom prst="roundRect">
             <a:avLst>
@@ -19122,7 +22285,7 @@
         </p:nvSpPr>
         <p:spPr>
           <a:xfrm>
-            <a:off x="5519776" y="3730752"/>
+            <a:off x="5519776" y="3511296"/>
             <a:ext cx="320040" cy="274320"/>
           </a:xfrm>
           <a:prstGeom prst="rect">
@@ -19161,7 +22324,7 @@
         </p:nvSpPr>
         <p:spPr>
           <a:xfrm>
-            <a:off x="640080" y="4187952"/>
+            <a:off x="640080" y="3913632"/>
             <a:ext cx="2331720" cy="274320"/>
           </a:xfrm>
           <a:prstGeom prst="rect">
@@ -19200,7 +22363,7 @@
         </p:nvSpPr>
         <p:spPr>
           <a:xfrm>
-            <a:off x="3063240" y="4233672"/>
+            <a:off x="3063240" y="3959352"/>
             <a:ext cx="2346808" cy="201168"/>
           </a:xfrm>
           <a:prstGeom prst="roundRect">
@@ -19227,8 +22390,8 @@
         </p:nvSpPr>
         <p:spPr>
           <a:xfrm>
-            <a:off x="3063240" y="4233672"/>
-            <a:ext cx="1173404" cy="201168"/>
+            <a:off x="3063240" y="3959352"/>
+            <a:ext cx="782269" cy="201168"/>
           </a:xfrm>
           <a:prstGeom prst="roundRect">
             <a:avLst>
@@ -19254,7 +22417,7 @@
         </p:nvSpPr>
         <p:spPr>
           <a:xfrm>
-            <a:off x="5519776" y="4187952"/>
+            <a:off x="5519776" y="3913632"/>
             <a:ext cx="320040" cy="274320"/>
           </a:xfrm>
           <a:prstGeom prst="rect">
@@ -19293,7 +22456,7 @@
         </p:nvSpPr>
         <p:spPr>
           <a:xfrm>
-            <a:off x="6324448" y="1901952"/>
+            <a:off x="640080" y="4315968"/>
             <a:ext cx="2331720" cy="274320"/>
           </a:xfrm>
           <a:prstGeom prst="rect">
@@ -19332,7 +22495,7 @@
         </p:nvSpPr>
         <p:spPr>
           <a:xfrm>
-            <a:off x="8747608" y="1947672"/>
+            <a:off x="3063240" y="4361688"/>
             <a:ext cx="2346808" cy="201168"/>
           </a:xfrm>
           <a:prstGeom prst="roundRect">
@@ -19359,8 +22522,8 @@
         </p:nvSpPr>
         <p:spPr>
           <a:xfrm>
-            <a:off x="8747608" y="1947672"/>
-            <a:ext cx="1173404" cy="201168"/>
+            <a:off x="3063240" y="4361688"/>
+            <a:ext cx="782269" cy="201168"/>
           </a:xfrm>
           <a:prstGeom prst="roundRect">
             <a:avLst>
@@ -19386,7 +22549,7 @@
         </p:nvSpPr>
         <p:spPr>
           <a:xfrm>
-            <a:off x="11204143" y="1901952"/>
+            <a:off x="5519776" y="4315968"/>
             <a:ext cx="320040" cy="274320"/>
           </a:xfrm>
           <a:prstGeom prst="rect">
@@ -19425,7 +22588,7 @@
         </p:nvSpPr>
         <p:spPr>
           <a:xfrm>
-            <a:off x="6324448" y="2359152"/>
+            <a:off x="6324448" y="1901952"/>
             <a:ext cx="2331720" cy="274320"/>
           </a:xfrm>
           <a:prstGeom prst="rect">
@@ -19464,7 +22627,7 @@
         </p:nvSpPr>
         <p:spPr>
           <a:xfrm>
-            <a:off x="8747608" y="2404872"/>
+            <a:off x="8747608" y="1947672"/>
             <a:ext cx="2346808" cy="201168"/>
           </a:xfrm>
           <a:prstGeom prst="roundRect">
@@ -19491,8 +22654,8 @@
         </p:nvSpPr>
         <p:spPr>
           <a:xfrm>
-            <a:off x="8747608" y="2404872"/>
-            <a:ext cx="1173404" cy="201168"/>
+            <a:off x="8747608" y="1947672"/>
+            <a:ext cx="782269" cy="201168"/>
           </a:xfrm>
           <a:prstGeom prst="roundRect">
             <a:avLst>
@@ -19518,7 +22681,7 @@
         </p:nvSpPr>
         <p:spPr>
           <a:xfrm>
-            <a:off x="11204143" y="2359152"/>
+            <a:off x="11204143" y="1901952"/>
             <a:ext cx="320040" cy="274320"/>
           </a:xfrm>
           <a:prstGeom prst="rect">
@@ -19557,7 +22720,7 @@
         </p:nvSpPr>
         <p:spPr>
           <a:xfrm>
-            <a:off x="6324448" y="2816352"/>
+            <a:off x="6324448" y="2304288"/>
             <a:ext cx="2331720" cy="274320"/>
           </a:xfrm>
           <a:prstGeom prst="rect">
@@ -19596,7 +22759,7 @@
         </p:nvSpPr>
         <p:spPr>
           <a:xfrm>
-            <a:off x="8747608" y="2862072"/>
+            <a:off x="8747608" y="2350008"/>
             <a:ext cx="2346808" cy="201168"/>
           </a:xfrm>
           <a:prstGeom prst="roundRect">
@@ -19623,8 +22786,8 @@
         </p:nvSpPr>
         <p:spPr>
           <a:xfrm>
-            <a:off x="8747608" y="2862072"/>
-            <a:ext cx="782269" cy="201168"/>
+            <a:off x="8747608" y="2350008"/>
+            <a:ext cx="521513" cy="201168"/>
           </a:xfrm>
           <a:prstGeom prst="roundRect">
             <a:avLst>
@@ -19650,7 +22813,7 @@
         </p:nvSpPr>
         <p:spPr>
           <a:xfrm>
-            <a:off x="11204143" y="2816352"/>
+            <a:off x="11204143" y="2304288"/>
             <a:ext cx="320040" cy="274320"/>
           </a:xfrm>
           <a:prstGeom prst="rect">
@@ -19689,7 +22852,7 @@
         </p:nvSpPr>
         <p:spPr>
           <a:xfrm>
-            <a:off x="6324448" y="3273552"/>
+            <a:off x="6324448" y="2706624"/>
             <a:ext cx="2331720" cy="274320"/>
           </a:xfrm>
           <a:prstGeom prst="rect">
@@ -19714,7 +22877,7 @@
                 <a:ea typeface="Calibri" pitchFamily="34" charset="-122"/>
                 <a:cs typeface="Calibri" pitchFamily="34" charset="-120"/>
               </a:rPr>
-              <a:t>mlops</a:t>
+              <a:t>integration</a:t>
             </a:r>
             <a:endParaRPr lang="en-US" sz="1150" dirty="0"/>
           </a:p>
@@ -19728,7 +22891,7 @@
         </p:nvSpPr>
         <p:spPr>
           <a:xfrm>
-            <a:off x="8747608" y="3319272"/>
+            <a:off x="8747608" y="2752344"/>
             <a:ext cx="2346808" cy="201168"/>
           </a:xfrm>
           <a:prstGeom prst="roundRect">
@@ -19755,8 +22918,8 @@
         </p:nvSpPr>
         <p:spPr>
           <a:xfrm>
-            <a:off x="8747608" y="3319272"/>
-            <a:ext cx="782269" cy="201168"/>
+            <a:off x="8747608" y="2752344"/>
+            <a:ext cx="521513" cy="201168"/>
           </a:xfrm>
           <a:prstGeom prst="roundRect">
             <a:avLst>
@@ -19782,7 +22945,7 @@
         </p:nvSpPr>
         <p:spPr>
           <a:xfrm>
-            <a:off x="11204143" y="3273552"/>
+            <a:off x="11204143" y="2706624"/>
             <a:ext cx="320040" cy="274320"/>
           </a:xfrm>
           <a:prstGeom prst="rect">
@@ -19821,7 +22984,7 @@
         </p:nvSpPr>
         <p:spPr>
           <a:xfrm>
-            <a:off x="6324448" y="3730752"/>
+            <a:off x="6324448" y="3108960"/>
             <a:ext cx="2331720" cy="274320"/>
           </a:xfrm>
           <a:prstGeom prst="rect">
@@ -19846,7 +23009,7 @@
                 <a:ea typeface="Calibri" pitchFamily="34" charset="-122"/>
                 <a:cs typeface="Calibri" pitchFamily="34" charset="-120"/>
               </a:rPr>
-              <a:t>product-management</a:t>
+              <a:t>mlops</a:t>
             </a:r>
             <a:endParaRPr lang="en-US" sz="1150" dirty="0"/>
           </a:p>
@@ -19860,7 +23023,7 @@
         </p:nvSpPr>
         <p:spPr>
           <a:xfrm>
-            <a:off x="8747608" y="3776472"/>
+            <a:off x="8747608" y="3154680"/>
             <a:ext cx="2346808" cy="201168"/>
           </a:xfrm>
           <a:prstGeom prst="roundRect">
@@ -19887,8 +23050,8 @@
         </p:nvSpPr>
         <p:spPr>
           <a:xfrm>
-            <a:off x="8747608" y="3776472"/>
-            <a:ext cx="782269" cy="201168"/>
+            <a:off x="8747608" y="3154680"/>
+            <a:ext cx="521513" cy="201168"/>
           </a:xfrm>
           <a:prstGeom prst="roundRect">
             <a:avLst>
@@ -19914,7 +23077,7 @@
         </p:nvSpPr>
         <p:spPr>
           <a:xfrm>
-            <a:off x="11204143" y="3730752"/>
+            <a:off x="11204143" y="3108960"/>
             <a:ext cx="320040" cy="274320"/>
           </a:xfrm>
           <a:prstGeom prst="rect">
@@ -19953,7 +23116,7 @@
         </p:nvSpPr>
         <p:spPr>
           <a:xfrm>
-            <a:off x="6324448" y="4187952"/>
+            <a:off x="6324448" y="3511296"/>
             <a:ext cx="2331720" cy="274320"/>
           </a:xfrm>
           <a:prstGeom prst="rect">
@@ -19978,7 +23141,7 @@
                 <a:ea typeface="Calibri" pitchFamily="34" charset="-122"/>
                 <a:cs typeface="Calibri" pitchFamily="34" charset="-120"/>
               </a:rPr>
-              <a:t>security</a:t>
+              <a:t>product-management</a:t>
             </a:r>
             <a:endParaRPr lang="en-US" sz="1150" dirty="0"/>
           </a:p>
@@ -19992,7 +23155,7 @@
         </p:nvSpPr>
         <p:spPr>
           <a:xfrm>
-            <a:off x="8747608" y="4233672"/>
+            <a:off x="8747608" y="3557016"/>
             <a:ext cx="2346808" cy="201168"/>
           </a:xfrm>
           <a:prstGeom prst="roundRect">
@@ -20019,8 +23182,8 @@
         </p:nvSpPr>
         <p:spPr>
           <a:xfrm>
-            <a:off x="8747608" y="4233672"/>
-            <a:ext cx="391135" cy="201168"/>
+            <a:off x="8747608" y="3557016"/>
+            <a:ext cx="521513" cy="201168"/>
           </a:xfrm>
           <a:prstGeom prst="roundRect">
             <a:avLst>
@@ -20046,7 +23209,7 @@
         </p:nvSpPr>
         <p:spPr>
           <a:xfrm>
-            <a:off x="11204143" y="4187952"/>
+            <a:off x="11204143" y="3511296"/>
             <a:ext cx="320040" cy="274320"/>
           </a:xfrm>
           <a:prstGeom prst="rect">
@@ -20071,6 +23234,138 @@
                 <a:ea typeface="Mulish" pitchFamily="34" charset="-122"/>
                 <a:cs typeface="Mulish" pitchFamily="34" charset="-120"/>
               </a:rPr>
+              <a:t>2</a:t>
+            </a:r>
+            <a:endParaRPr lang="en-US" sz="1150" dirty="0"/>
+          </a:p>
+        </p:txBody>
+      </p:sp>
+      <p:sp>
+        <p:nvSpPr>
+          <p:cNvPr id="55" name="Text 52"/>
+          <p:cNvSpPr txBox="1"/>
+          <p:nvPr/>
+        </p:nvSpPr>
+        <p:spPr>
+          <a:xfrm>
+            <a:off x="6324448" y="3913632"/>
+            <a:ext cx="2331720" cy="274320"/>
+          </a:xfrm>
+          <a:prstGeom prst="rect">
+            <a:avLst/>
+          </a:prstGeom>
+          <a:noFill/>
+          <a:ln/>
+        </p:spPr>
+        <p:txBody>
+          <a:bodyPr wrap="square" lIns="0" tIns="0" rIns="0" bIns="0" rtlCol="0" anchor="ctr"/>
+          <a:lstStyle/>
+          <a:p>
+            <a:pPr indent="0" marL="0">
+              <a:buNone/>
+            </a:pPr>
+            <a:r>
+              <a:rPr lang="en-US" sz="1150" dirty="0">
+                <a:solidFill>
+                  <a:srgbClr val="051D60"/>
+                </a:solidFill>
+                <a:latin typeface="Calibri" pitchFamily="34" charset="0"/>
+                <a:ea typeface="Calibri" pitchFamily="34" charset="-122"/>
+                <a:cs typeface="Calibri" pitchFamily="34" charset="-120"/>
+              </a:rPr>
+              <a:t>security</a:t>
+            </a:r>
+            <a:endParaRPr lang="en-US" sz="1150" dirty="0"/>
+          </a:p>
+        </p:txBody>
+      </p:sp>
+      <p:sp>
+        <p:nvSpPr>
+          <p:cNvPr id="56" name="Shape 53"/>
+          <p:cNvSpPr/>
+          <p:nvPr/>
+        </p:nvSpPr>
+        <p:spPr>
+          <a:xfrm>
+            <a:off x="8747608" y="3959352"/>
+            <a:ext cx="2346808" cy="201168"/>
+          </a:xfrm>
+          <a:prstGeom prst="roundRect">
+            <a:avLst>
+              <a:gd name="adj" fmla="val 18182"/>
+            </a:avLst>
+          </a:prstGeom>
+          <a:solidFill>
+            <a:srgbClr val="E4DED3"/>
+          </a:solidFill>
+          <a:ln w="12700">
+            <a:solidFill>
+              <a:srgbClr val="E4DED3"/>
+            </a:solidFill>
+            <a:prstDash val="solid"/>
+          </a:ln>
+        </p:spPr>
+      </p:sp>
+      <p:sp>
+        <p:nvSpPr>
+          <p:cNvPr id="57" name="Shape 54"/>
+          <p:cNvSpPr/>
+          <p:nvPr/>
+        </p:nvSpPr>
+        <p:spPr>
+          <a:xfrm>
+            <a:off x="8747608" y="3959352"/>
+            <a:ext cx="260756" cy="201168"/>
+          </a:xfrm>
+          <a:prstGeom prst="roundRect">
+            <a:avLst>
+              <a:gd name="adj" fmla="val 18182"/>
+            </a:avLst>
+          </a:prstGeom>
+          <a:solidFill>
+            <a:srgbClr val="051D60"/>
+          </a:solidFill>
+          <a:ln w="12700">
+            <a:solidFill>
+              <a:srgbClr val="051D60"/>
+            </a:solidFill>
+            <a:prstDash val="solid"/>
+          </a:ln>
+        </p:spPr>
+      </p:sp>
+      <p:sp>
+        <p:nvSpPr>
+          <p:cNvPr id="58" name="Text 55"/>
+          <p:cNvSpPr txBox="1"/>
+          <p:nvPr/>
+        </p:nvSpPr>
+        <p:spPr>
+          <a:xfrm>
+            <a:off x="11204143" y="3913632"/>
+            <a:ext cx="320040" cy="274320"/>
+          </a:xfrm>
+          <a:prstGeom prst="rect">
+            <a:avLst/>
+          </a:prstGeom>
+          <a:noFill/>
+          <a:ln/>
+        </p:spPr>
+        <p:txBody>
+          <a:bodyPr wrap="square" lIns="0" tIns="0" rIns="0" bIns="0" rtlCol="0" anchor="ctr"/>
+          <a:lstStyle/>
+          <a:p>
+            <a:pPr indent="0" marL="0">
+              <a:buNone/>
+            </a:pPr>
+            <a:r>
+              <a:rPr lang="en-US" sz="1150" b="1" dirty="0">
+                <a:solidFill>
+                  <a:srgbClr val="051D60"/>
+                </a:solidFill>
+                <a:latin typeface="Mulish" pitchFamily="34" charset="0"/>
+                <a:ea typeface="Mulish" pitchFamily="34" charset="-122"/>
+                <a:cs typeface="Mulish" pitchFamily="34" charset="-120"/>
+              </a:rPr>
               <a:t>1</a:t>
             </a:r>
             <a:endParaRPr lang="en-US" sz="1150" dirty="0"/>
@@ -20079,7 +23374,7 @@
       </p:sp>
       <p:sp>
         <p:nvSpPr>
-          <p:cNvPr id="55" name="Shape 52"/>
+          <p:cNvPr id="59" name="Shape 56"/>
           <p:cNvSpPr/>
           <p:nvPr/>
         </p:nvSpPr>
@@ -20106,7 +23401,7 @@
       </p:sp>
       <p:sp>
         <p:nvSpPr>
-          <p:cNvPr id="56" name="Text 53"/>
+          <p:cNvPr id="60" name="Text 57"/>
           <p:cNvSpPr txBox="1"/>
           <p:nvPr/>
         </p:nvSpPr>
@@ -20145,7 +23440,7 @@
       </p:sp>
       <p:sp>
         <p:nvSpPr>
-          <p:cNvPr id="57" name="Text 54"/>
+          <p:cNvPr id="61" name="Text 58"/>
           <p:cNvSpPr txBox="1"/>
           <p:nvPr/>
         </p:nvSpPr>
@@ -20187,7 +23482,7 @@
       </p:sp>
       <p:sp>
         <p:nvSpPr>
-          <p:cNvPr id="58" name="Shape 55"/>
+          <p:cNvPr id="62" name="Shape 59"/>
           <p:cNvSpPr/>
           <p:nvPr/>
         </p:nvSpPr>
@@ -20214,7 +23509,7 @@
       </p:sp>
       <p:sp>
         <p:nvSpPr>
-          <p:cNvPr id="59" name="Text 56"/>
+          <p:cNvPr id="63" name="Text 60"/>
           <p:cNvSpPr txBox="1"/>
           <p:nvPr/>
         </p:nvSpPr>
@@ -20253,7 +23548,7 @@
       </p:sp>
       <p:sp>
         <p:nvSpPr>
-          <p:cNvPr id="60" name="Text 57"/>
+          <p:cNvPr id="64" name="Text 61"/>
           <p:cNvSpPr txBox="1"/>
           <p:nvPr/>
         </p:nvSpPr>
@@ -20499,7 +23794,7 @@
                 <a:ea typeface="Calibri" pitchFamily="34" charset="-122"/>
                 <a:cs typeface="Calibri" pitchFamily="34" charset="-120"/>
               </a:rPr>
-              <a:t>navi-delivery  ·  v0.1.0  ·  7 / 17</a:t>
+              <a:t>navi-delivery  ·  v0.1.0  ·  7 / 19</a:t>
             </a:r>
             <a:endParaRPr lang="en-US" sz="850" dirty="0"/>
           </a:p>
@@ -22759,7 +26054,7 @@
                 <a:ea typeface="Calibri" pitchFamily="34" charset="-122"/>
                 <a:cs typeface="Calibri" pitchFamily="34" charset="-120"/>
               </a:rPr>
-              <a:t>navi-delivery  ·  v0.1.0  ·  8 / 17</a:t>
+              <a:t>navi-delivery  ·  v0.1.0  ·  8 / 19</a:t>
             </a:r>
             <a:endParaRPr lang="en-US" sz="850" dirty="0"/>
           </a:p>
@@ -24732,7 +28027,7 @@
                 <a:ea typeface="Calibri" pitchFamily="34" charset="-122"/>
                 <a:cs typeface="Calibri" pitchFamily="34" charset="-120"/>
               </a:rPr>
-              <a:t>navi-delivery  ·  v0.1.0  ·  9 / 17</a:t>
+              <a:t>navi-delivery  ·  v0.1.0  ·  9 / 19</a:t>
             </a:r>
             <a:endParaRPr lang="en-US" sz="850" dirty="0"/>
           </a:p>

--- a/docs/navi-delivery-overview.pptx
+++ b/docs/navi-delivery-overview.pptx
@@ -520,7 +520,7 @@
           <a:p>
             <a:r>
               <a:rPr lang="en-US" dirty="0"/>
-              <a:t>navi-delivery is built and shipped, not a design. Counts read from the repo at build time: 11 agents, 49 skills across 13 disciplines, 9 phases and gates, 4 lanes, an 8-verb CLI.</a:t>
+              <a:t>navi-delivery is built and shipped, not a design. Counts read from the repo at build time: 11 agents, 50 skills across 13 disciplines, 9 phases and gates, 4 lanes, an 8-verb CLI.</a:t>
             </a:r>
             <a:endParaRPr lang="en-US" dirty="0"/>
           </a:p>
@@ -2822,7 +2822,7 @@
                 <a:ea typeface="Mulish" pitchFamily="34" charset="-122"/>
                 <a:cs typeface="Mulish" pitchFamily="34" charset="-120"/>
               </a:rPr>
-              <a:t>49</a:t>
+              <a:t>50</a:t>
             </a:r>
             <a:endParaRPr lang="en-US" sz="3400" dirty="0"/>
           </a:p>
@@ -12220,7 +12220,7 @@
                 <a:ea typeface="Calibri" pitchFamily="34" charset="-122"/>
                 <a:cs typeface="Calibri" pitchFamily="34" charset="-120"/>
               </a:rPr>
-              <a:t>→ the preferred way in — 49 skills and 11 agents, with no clone</a:t>
+              <a:t>→ the preferred way in — 50 skills and 11 agents, with no clone</a:t>
             </a:r>
             <a:endParaRPr lang="en-US" sz="900" dirty="0"/>
           </a:p>
@@ -17651,7 +17651,7 @@
                 <a:ea typeface="Mulish" pitchFamily="34" charset="-122"/>
                 <a:cs typeface="Mulish" pitchFamily="34" charset="-120"/>
               </a:rPr>
-              <a:t>49</a:t>
+              <a:t>50</a:t>
             </a:r>
             <a:endParaRPr lang="en-US" sz="3000" dirty="0"/>
           </a:p>
@@ -21509,7 +21509,7 @@
                 <a:ea typeface="Calibri" pitchFamily="34" charset="-122"/>
                 <a:cs typeface="Calibri" pitchFamily="34" charset="-120"/>
               </a:rPr>
-              <a:t>49 SKILLS</a:t>
+              <a:t>50 SKILLS</a:t>
             </a:r>
             <a:endParaRPr lang="en-US" sz="1000" dirty="0"/>
           </a:p>
@@ -21689,7 +21689,7 @@
                 <a:ea typeface="Calibri" pitchFamily="34" charset="-122"/>
                 <a:cs typeface="Calibri" pitchFamily="34" charset="-120"/>
               </a:rPr>
-              <a:t>software-development</a:t>
+              <a:t>platform-devops</a:t>
             </a:r>
             <a:endParaRPr lang="en-US" sz="1150" dirty="0"/>
           </a:p>
@@ -21821,7 +21821,7 @@
                 <a:ea typeface="Calibri" pitchFamily="34" charset="-122"/>
                 <a:cs typeface="Calibri" pitchFamily="34" charset="-120"/>
               </a:rPr>
-              <a:t>platform-devops</a:t>
+              <a:t>software-development</a:t>
             </a:r>
             <a:endParaRPr lang="en-US" sz="1150" dirty="0"/>
           </a:p>
@@ -21863,7 +21863,7 @@
         <p:spPr>
           <a:xfrm>
             <a:off x="3063240" y="2350008"/>
-            <a:ext cx="2086051" cy="201168"/>
+            <a:ext cx="2346808" cy="201168"/>
           </a:xfrm>
           <a:prstGeom prst="roundRect">
             <a:avLst>
@@ -21914,7 +21914,7 @@
                 <a:ea typeface="Mulish" pitchFamily="34" charset="-122"/>
                 <a:cs typeface="Mulish" pitchFamily="34" charset="-120"/>
               </a:rPr>
-              <a:t>8</a:t>
+              <a:t>9</a:t>
             </a:r>
             <a:endParaRPr lang="en-US" sz="1150" dirty="0"/>
           </a:p>
